--- a/slides/decks/s21-aml.pptx
+++ b/slides/decks/s21-aml.pptx
@@ -135,13 +135,13 @@
   <p:extLst>
     <p:ext uri="{521415D9-36F7-43E2-AB2F-B90AF26B5E84}">
       <p14:sectionLst xmlns:p14="http://schemas.microsoft.com/office/powerpoint/2010/main">
-        <p14:section name="Opening" id="{1aabeb96-7c07-d968-aacc-ca26118ca7b6}">
+        <p14:section name="Opening" id="{eb80c065-074c-e7f6-fa24-fa652b30f5c5}">
           <p14:sldIdLst>
             <p14:sldId id="256"/>
             <p14:sldId id="257"/>
           </p14:sldIdLst>
         </p14:section>
-        <p14:section name="AML in CR1" id="{30e729cb-3f46-161e-9e3e-fe6652af954a}">
+        <p14:section name="AML in CR1" id="{a2333b75-2818-c8dc-7be8-97c493208c7a}">
           <p14:sldIdLst>
             <p14:sldId id="258"/>
             <p14:sldId id="259"/>
@@ -152,14 +152,14 @@
             <p14:sldId id="264"/>
           </p14:sldIdLst>
         </p14:section>
-        <p14:section name="Advanced AML" id="{858031b2-52d8-fa9e-3625-5327f1f74dc3}">
+        <p14:section name="Advanced AML" id="{4101d051-f112-6928-d5f1-55959bb9af72}">
           <p14:sldIdLst>
             <p14:sldId id="265"/>
             <p14:sldId id="266"/>
             <p14:sldId id="267"/>
           </p14:sldIdLst>
         </p14:section>
-        <p14:section name="APL and children" id="{ec064552-bb6d-d5c4-51d4-e5fdb4610799}">
+        <p14:section name="APL and children" id="{3b6a8721-c71e-110a-7747-d7af37f9b9e2}">
           <p14:sldIdLst>
             <p14:sldId id="268"/>
             <p14:sldId id="269"/>
@@ -167,7 +167,7 @@
             <p14:sldId id="271"/>
           </p14:sldIdLst>
         </p14:section>
-        <p14:section name="Board questions" id="{d12d5c73-7e36-f1f3-df2e-96cec35958d7}">
+        <p14:section name="Board questions" id="{fc41bc2e-065a-282c-f722-cee38bdf9f0b}">
           <p14:sldIdLst>
             <p14:sldId id="272"/>
             <p14:sldId id="273"/>
@@ -177,7 +177,7 @@
             <p14:sldId id="277"/>
           </p14:sldIdLst>
         </p14:section>
-        <p14:section name="References" id="{fe0f33cc-0a1d-a6a0-6c11-ce608caf3f71}">
+        <p14:section name="References" id="{2973d131-65b5-3b42-81e6-0a53cb3c2203}">
           <p14:sldIdLst>
             <p14:sldId id="278"/>
             <p14:sldId id="279"/>
@@ -185,7 +185,7 @@
             <p14:sldId id="281"/>
           </p14:sldIdLst>
         </p14:section>
-        <p14:section name="Backup" id="{7400123d-2733-5a9c-fd88-50150fb2f033}">
+        <p14:section name="Backup" id="{f5d0988e-d8b8-5f5d-fa73-58acfa320414}">
           <p14:sldIdLst>
             <p14:sldId id="282"/>
             <p14:sldId id="283"/>
@@ -612,7 +612,7 @@
             </a:pPr>
             <a:r>
               <a:rPr lang="en-US" dirty="0"/>
-              <a:t>各位好，第 21 堂講 AML 的移植，核心是 EBMT Handbook 第 70 章，兒童的第 71 章只挑對照的考點。從 CR1 要不要移植講起，再到 primary refractory AML、移植後的復發預防和 APL，最後三題 board-style 題目。</a:t>
+              <a:t>各位好，第 21 堂講 AML 的移植，核心是 EBMT Handbook 第 70 章，兒童的第 71 章只挑對照的考點。從 CR1 要不要移植講起，再到 primary refractory AML、移植後的復發預防和 APL，最後三題 board-style 題目。AML 是歐洲 allo-HCT 最大宗的適應症，也是移植考題的大宗。</a:t>
             </a:r>
           </a:p>
         </p:txBody>
@@ -762,6 +762,17 @@
               <a:t>移植後 30 到 45 天做骨髓 MRD，用來決定是否提早減免疫抑制劑，或給 prophylactic、pre-emptive DLI。第 71 章另外提到成人的 ASAP 隨機試驗，R/R AML 直接做 sequential conditioning 再立刻移植，LFS 和先做 intensive induction 再移植相近。</a:t>
             </a:r>
           </a:p>
+          <a:p>
+            <a:pPr>
+              <a:spcAft>
+                <a:spcPts val="600"/>
+              </a:spcAft>
+            </a:pPr>
+            <a:r>
+              <a:rPr lang="en-US" dirty="0"/>
+              <a:t>臨床上的意思是，PREF 的病人在診斷時就應該已經在找 donor，等到第二個 course 失敗才開始，往往錯過最好的移植時機。書上也承認，哪些 PREF 病人最能受益仍不清楚，需要更多疾病生物學和化療反應的研究。</a:t>
+            </a:r>
+          </a:p>
         </p:txBody>
       </p:sp>
       <p:sp>
@@ -1023,6 +1034,17 @@
               <a:t>Maintenance 的藥物細節在第 19 堂講過，這裡記住 sorafenib 和 FLT3-ITD 的配對就好。</a:t>
             </a:r>
           </a:p>
+          <a:p>
+            <a:pPr>
+              <a:spcAft>
+                <a:spcPts val="600"/>
+              </a:spcAft>
+            </a:pPr>
+            <a:r>
+              <a:rPr lang="en-US" dirty="0"/>
+              <a:t>第 71 章也提到，sorafenib 和移植物的 allo-immune 效應有協同作用，移植後復發的病人用 sorafenib 可以得到更深、更持久的緩解。要注意的毒性是心臟毒性、手足感覺異常和骨髓抑制。</a:t>
+            </a:r>
+          </a:p>
         </p:txBody>
       </p:sp>
       <p:sp>
@@ -1159,6 +1181,17 @@
               <a:t>診斷工具裡 RT-PCR 最有用，特異、快速又敏感，還能分出 isoform，之後才能追 MRD。傳統核型大約兩成會漏掉。變異的 RARA partner 中，PLZF 和 STAT5B 對 ATRA 有抗性，細節在 backup。</a:t>
             </a:r>
           </a:p>
+          <a:p>
+            <a:pPr>
+              <a:spcAft>
+                <a:spcPts val="600"/>
+              </a:spcAft>
+            </a:pPr>
+            <a:r>
+              <a:rPr lang="en-US" dirty="0"/>
+              <a:t>出血的來源是 leukemic blasts 活化凝血系統並造成 hyperfibrinolysis，第 70 章在 AML 的臨床表現就提過，在 APL 最明顯。另外，傳統核型除了確認 t(15;17)，三成病人還會看到額外異常，最常見的是 +8。</a:t>
+            </a:r>
+          </a:p>
         </p:txBody>
       </p:sp>
       <p:sp>
@@ -1273,6 +1306,17 @@
               <a:t>復發之後的原則是換一套 backbone。第一線用 ATRA 加化療的，salvage 用 ATRA 加 ATO；第一線用過 ATRA 加 ATO 的，改用 ATRA 加化療。Gemtuzumab ozogamicin 兩種情況都可考慮，但一律當作通往 HCT 的橋樑。Salvage 的目標是拿到 molecular remission 再去移植。</a:t>
             </a:r>
           </a:p>
+          <a:p>
+            <a:pPr>
+              <a:spcAft>
+                <a:spcPts val="600"/>
+              </a:spcAft>
+            </a:pPr>
+            <a:r>
+              <a:rPr lang="en-US" dirty="0"/>
+              <a:t>這裡的邏輯是避免用病人已經失敗過的組合再救一次。如果病人不適合移植，或 CR1 持續很久才復發，書上也接受只給 maintenance，藥物依之前的治療和臨床狀況挑選。</a:t>
+            </a:r>
+          </a:p>
         </p:txBody>
       </p:sp>
       <p:sp>
@@ -1420,6 +1464,17 @@
               <a:t>表上還有幾個細節。Conditioning 用一般 AML 的方案，auto 最好含 high-dose Ara-C，例如 BEA；幹細胞來源都是 mobilized peripheral blood；曾經 CNS 復發的人要做 MTX、hydrocortisone、Ara-C 的 intrathecal 預防。移植後 maintenance 沒有證據，但 ATO 加 ATRA 可能有效。</a:t>
             </a:r>
           </a:p>
+          <a:p>
+            <a:pPr>
+              <a:spcAft>
+                <a:spcPts val="600"/>
+              </a:spcAft>
+            </a:pPr>
+            <a:r>
+              <a:rPr lang="en-US" dirty="0"/>
+              <a:t>Allo 不是第一選擇，關鍵在 TRM。日本 JALSG 的非比較性研究也顯示，ATO salvage 之後接 auto-HCT 效果很好，所以只要拿到 molecular remission，auto 就是主流。</a:t>
+            </a:r>
+          </a:p>
         </p:txBody>
       </p:sp>
       <p:sp>
@@ -1556,6 +1611,17 @@
               <a:t>Caption 的 BFM 2007 試驗值得記。加了 melphalan 的 BU/CY/MEL，12 歲以下 TRM 9%，青少年卻到 31%，所以這個年齡層要避免。復發後第二次移植的 TRM 超過 30%，可以考慮 RIC。</a:t>
             </a:r>
           </a:p>
+          <a:p>
+            <a:pPr>
+              <a:spcAft>
+                <a:spcPts val="600"/>
+              </a:spcAft>
+            </a:pPr>
+            <a:r>
+              <a:rPr lang="en-US" dirty="0"/>
+              <a:t>兒童 MRD 的數字也可以參考。NOPHO-AML 2004 用 0.1% 當 cut-off，consolidation 前 MRD 陽性的病人五年 EFS 只有 11%，陰性的是 57%。</a:t>
+            </a:r>
+          </a:p>
         </p:txBody>
       </p:sp>
       <p:sp>
@@ -1656,7 +1722,18 @@
             </a:pPr>
             <a:r>
               <a:rPr lang="en-US" dirty="0"/>
-              <a:t>第一題。45 歲男性，AML，NPM1 mutation、沒有 FLT3-ITD、正常核型。一次 induction 就 CR，但兩個 cycle 之後 NPM1 qPCR 的 MRD 仍然陽性。他有 HLA 相合的兄弟，HCT-CI 是 1 分。依第 70 章，最適合的 post-remission treatment 是哪一個。先判斷 ELN 風險組，再看 MRD。</a:t>
+              <a:t>第一題。45 歲男性，AML，NPM1 mutation、沒有 FLT3-ITD、正常核型。一次 induction 就 CR，但兩個 cycle 之後 NPM1 qPCR 的 MRD 仍然陽性。他有 HLA 相合的兄弟，HCT-CI 是 1 分。依第 70 章，最適合的 post-remission treatment 是哪一個。先判斷 ELN 風險組，再看 MRD。想想他落在 Table 70.1 的哪一格。</a:t>
+            </a:r>
+          </a:p>
+          <a:p>
+            <a:pPr>
+              <a:spcAft>
+                <a:spcPts val="600"/>
+              </a:spcAft>
+            </a:pPr>
+            <a:r>
+              <a:rPr lang="en-US" dirty="0"/>
+              <a:t>選項 A 是只繼續 high-dose cytarabine，B 是 auto-HCT，C 是 CR1 做 sibling allo-HCT，D 是等血液學復發再移植，E 是 azacitidine 加 venetoclax maintenance 取代移植。</a:t>
             </a:r>
           </a:p>
           <a:p>
@@ -1784,6 +1861,17 @@
               <a:t>最常見的錯誤是 A 或 B，看到 favorable 就直覺不移植。Chemo 或 auto-HCT 只適用在 MRD 陰性的 favorable。D 等到復發才移植，錯過 CR1 的時機；E 的 azacitidine 加 venetoclax 是給不適合 intensive 治療的人的第一線，不是取代移植的選項。</a:t>
             </a:r>
           </a:p>
+          <a:p>
+            <a:pPr>
+              <a:spcAft>
+                <a:spcPts val="600"/>
+              </a:spcAft>
+            </a:pPr>
+            <a:r>
+              <a:rPr lang="en-US" dirty="0"/>
+              <a:t>這也是 risk-adapted approach 的核心，治療反應比診斷時的特徵更重要。同樣的病人如果 MRD 是陰性，答案就會變成 chemo 或 auto-HCT。</a:t>
+            </a:r>
+          </a:p>
         </p:txBody>
       </p:sp>
       <p:sp>
@@ -1884,7 +1972,18 @@
             </a:pPr>
             <a:r>
               <a:rPr lang="en-US" dirty="0"/>
-              <a:t>第二題。44 歲女性，AML，正常核型，NPM1、FLT3 都是 wild-type，沒有 TP53 mutation。7+3 之後再給一個含 intermediate-dose cytarabine 的 course，骨髓仍有 18% blasts。有 10/10 的 unrelated donor，HCT-CI 是 0。依第 70 章，下一步最好的是哪一個。</a:t>
+              <a:t>第二題。44 歲女性，AML，正常核型，NPM1、FLT3 都是 wild-type，沒有 TP53 mutation。7+3 之後再給一個含 intermediate-dose cytarabine 的 course，骨髓仍有 18% blasts。有 10/10 的 unrelated donor，HCT-CI 是 0。依第 70 章，下一步最好的是哪一個。先確認她算不算 primary refractory，再想移植的時機和 conditioning。</a:t>
+            </a:r>
+          </a:p>
+          <a:p>
+            <a:pPr>
+              <a:spcAft>
+                <a:spcPts val="600"/>
+              </a:spcAft>
+            </a:pPr>
+            <a:r>
+              <a:rPr lang="en-US" dirty="0"/>
+              <a:t>A 是先給第三個 intensive course，等 CR 再移植；B 是盡快用 myeloablative conditioning 做 allo；C 是 FLAMSA 之後移植；D 是 auto-HCT；E 是 azacitidine 加 venetoclax，不移植。</a:t>
             </a:r>
           </a:p>
           <a:p>
@@ -2023,6 +2122,17 @@
               <a:t>第三段是 APL。APL 在 CR1 幾乎不移植，復發後反而 auto-HCT 優先，這和其他 AML 剛好相反，是很典型的考點。這段最後用一張表對照兒童 AML 的做法。三題考題放在最後五分鐘。</a:t>
             </a:r>
           </a:p>
+          <a:p>
+            <a:pPr>
+              <a:spcAft>
+                <a:spcPts val="600"/>
+              </a:spcAft>
+            </a:pPr>
+            <a:r>
+              <a:rPr lang="en-US" dirty="0"/>
+              <a:t>題目分別對應 MRD 陽性的 NPM1 AML、primary refractory AML，和復發的 APL。</a:t>
+            </a:r>
+          </a:p>
         </p:txBody>
       </p:sp>
       <p:sp>
@@ -2137,6 +2247,17 @@
               <a:t>A 是最常見的陷阱。等到 morphological CR 才移植，書上只建議用在 TP53 mutation 或 inv(3) 這類極高風險的病人，她兩者都沒有。C 錯在 FLAMSA 在 Craddock 2021 的隨機試驗中沒有贏過 FB2。D 的 auto-HCT 沒有 GVL，E 則放棄了唯一的治癒機會。</a:t>
             </a:r>
           </a:p>
+          <a:p>
+            <a:pPr>
+              <a:spcAft>
+                <a:spcPts val="600"/>
+              </a:spcAft>
+            </a:pPr>
+            <a:r>
+              <a:rPr lang="en-US" dirty="0"/>
+              <a:t>移植之後，記得在 day 30 到 45 做骨髓 MRD，決定要不要提早減免疫抑制或給 DLI。</a:t>
+            </a:r>
+          </a:p>
         </p:txBody>
       </p:sp>
       <p:sp>
@@ -2247,6 +2368,17 @@
               </a:spcAft>
             </a:pPr>
             <a:r>
+              <a:rPr lang="en-US" dirty="0"/>
+              <a:t>A 是再給一次 ATRA 加 ATO，CR2 做 allo；B 是 ATRA 加化療，molecular CR2 後做 auto；C 是不救援直接 allo；D 是 gemtuzumab maintenance 不移植；E 是 ATRA 加化療，molecular CR2 後做 allo。</a:t>
+            </a:r>
+          </a:p>
+          <a:p>
+            <a:pPr>
+              <a:spcAft>
+                <a:spcPts val="600"/>
+              </a:spcAft>
+            </a:pPr>
+            <a:r>
               <a:rPr lang="en-US" b="1" dirty="0"/>
               <a:t>[Pause for answers.]</a:t>
             </a:r>
@@ -2365,6 +2497,17 @@
               <a:t>E 最容易誤選，有 sibling donor 就直覺選 allo。但 allo 只保留給 salvage 後 PML-RARA 仍陽性、auto 失敗，或復發風險高而 TRM 低的人。C 不先救援就移植，D 的 gemtuzumab 只能當 bridge，都不對。</a:t>
             </a:r>
           </a:p>
+          <a:p>
+            <a:pPr>
+              <a:spcAft>
+                <a:spcPts val="600"/>
+              </a:spcAft>
+            </a:pPr>
+            <a:r>
+              <a:rPr lang="en-US" dirty="0"/>
+              <a:t>記法是換 backbone、拿到 molecular CR、做 auto。Salvage 後 PML-RARA 仍是陽性，才改走 allo。移植後再用 RQ-PCR 每三個月追蹤，至少兩到三年。</a:t>
+            </a:r>
+          </a:p>
         </p:txBody>
       </p:sp>
       <p:sp>
@@ -3143,6 +3286,17 @@
               <a:t>這張表最重要的訊息在最下面那行。AML 治療失敗主要是 CR1 之後復發，而不是 induction 失敗或 TRM，所以後面的重點都放在 CR1 之後要怎麼鞏固。</a:t>
             </a:r>
           </a:p>
+          <a:p>
+            <a:pPr>
+              <a:spcAft>
+                <a:spcPts val="600"/>
+              </a:spcAft>
+            </a:pPr>
+            <a:r>
+              <a:rPr lang="en-US" dirty="0"/>
+              <a:t>臨床上這張表決定病人用哪條路走到 CR1。走 intensive 路線的病人，後面才有 Table 70.1 的選擇；用 azacitidine 加 venetoclax 這類低強度方案的老年人，現在也有不少在緩解後接受移植，第 70 章的 practical issues 有提到。</a:t>
+            </a:r>
+          </a:p>
         </p:txBody>
       </p:sp>
       <p:sp>
@@ -3290,6 +3444,17 @@
               <a:t>考試常把 t(9;11) 和其他 KMT2A rearrangement 放在一起考。t(9;11) 是 intermediate，其他 KMT2A partner 才是 adverse。</a:t>
             </a:r>
           </a:p>
+          <a:p>
+            <a:pPr>
+              <a:spcAft>
+                <a:spcPts val="600"/>
+              </a:spcAft>
+            </a:pPr>
+            <a:r>
+              <a:rPr lang="en-US" dirty="0"/>
+              <a:t>這張表在臨床上的意義，是診斷時就大致知道病人會不會走向移植。書上建議所有適合移植的成人在診斷時就做 HLA typing，adverse 組更不能拖。</a:t>
+            </a:r>
+          </a:p>
         </p:txBody>
       </p:sp>
       <p:sp>
@@ -3444,6 +3609,17 @@
               </a:spcAft>
             </a:pPr>
             <a:r>
+              <a:rPr lang="en-US" dirty="0"/>
+              <a:t>這些改變的整體效果是 adverse 組變大。一個原本歸 intermediate 的病人，如果 NGS 抓到 SRSF2 或 STAG2，現在就是 adverse，Table 70.1 的建議也從看 MRD 決定，變成不論 MRD 都考慮 allo。反過來，TP53 VAF 只有 5% 的病人，就不再歸 adverse。</a:t>
+            </a:r>
+          </a:p>
+          <a:p>
+            <a:pPr>
+              <a:spcAft>
+                <a:spcPts val="600"/>
+              </a:spcAft>
+            </a:pPr>
+            <a:r>
               <a:rPr lang="en-US" b="1" dirty="0"/>
               <a:t>講者提醒（不念出來）：</a:t>
             </a:r>
@@ -3595,6 +3771,17 @@
               <a:t>MRD 也不是萬能。Course 1 之後 flow MRD 小於等於 0.1% 的病人，仍有大約四分之一會復發。MRD 陰性降低風險，但不排除復發。</a:t>
             </a:r>
           </a:p>
+          <a:p>
+            <a:pPr>
+              <a:spcAft>
+                <a:spcPts val="600"/>
+              </a:spcAft>
+            </a:pPr>
+            <a:r>
+              <a:rPr lang="en-US" dirty="0"/>
+              <a:t>MRD 的時間點有兩個用途。Induction 後早期測，用來確認緩解的深度、決定 post-remission treatment；post-remission 之後繼續測，則是為了抓即將發生的復發。所以從 ELN 2017 開始，在血液學 CR 之外，MRD negativity 也被當成一個 response end point。</a:t>
+            </a:r>
+          </a:p>
         </p:txBody>
       </p:sp>
       <p:sp>
@@ -3742,6 +3929,17 @@
               <a:t>這張表背後是 GVL 和 TRM 的平衡。Allo-HCT 的 GVL 效果不分 cytogenetic 亞組、也不分 MRD 狀態都存在，是最強的防復發手段；但 TRM 會把好處吃掉，尤其在原本復發率就低的病人身上。</a:t>
             </a:r>
           </a:p>
+          <a:p>
+            <a:pPr>
+              <a:spcAft>
+                <a:spcPts val="600"/>
+              </a:spcAft>
+            </a:pPr>
+            <a:r>
+              <a:rPr lang="en-US" dirty="0"/>
+              <a:t>臨床上照這張表走，先用診斷時的遺傳學分 ELN 組，再看 induction 之後的 MRD，最後用 TRM 分數判斷這位病人能不能承擔 allo。三者缺一不可，這就是書上說的 risk-adapted approach。</a:t>
+            </a:r>
+          </a:p>
         </p:txBody>
       </p:sp>
       <p:sp>
@@ -3867,6 +4065,17 @@
               <a:t>所以書上強烈建議 intermediate risk 一定要先測 MRD，再決定 post-remission treatment。</a:t>
             </a:r>
           </a:p>
+          <a:p>
+            <a:pPr>
+              <a:spcAft>
+                <a:spcPts val="600"/>
+              </a:spcAft>
+            </a:pPr>
+            <a:r>
+              <a:rPr lang="en-US" dirty="0"/>
+              <a:t>不過 MRD 陰性的 intermediate 也不是一律做 auto。Table 70.1 說，如果預估 TRM 可以接受，又有 sibling 或 10/10 MUD，仍然可以考慮 allo；TRM 偏高時，auto 和化療才是比較好的選擇。</a:t>
+            </a:r>
+          </a:p>
         </p:txBody>
       </p:sp>
       <p:sp>
@@ -4001,6 +4210,17 @@
             <a:r>
               <a:rPr lang="en-US" dirty="0"/>
               <a:t>因為 RIC、支持療法和 GVHD 預防的進步，TRM 已經大幅下降，舊模型在現在的預測力變差。ALWP 因此針對老年人接受 RIC，以及使用 PTCy 的病人，各做了新的分數。書上建議盡量用針對特定族群的專屬分數。</a:t>
+            </a:r>
+          </a:p>
+          <a:p>
+            <a:pPr>
+              <a:spcAft>
+                <a:spcPts val="600"/>
+              </a:spcAft>
+            </a:pPr>
+            <a:r>
+              <a:rPr lang="en-US" dirty="0"/>
+              <a:t>這些分數的用處，是把 Table 70.1 那句「除非 TRM 過高」變成可以討論的數字，在移植會議和跟病人說明時都比較具體。</a:t>
             </a:r>
           </a:p>
         </p:txBody>

--- a/slides/decks/s21-aml.pptx
+++ b/slides/decks/s21-aml.pptx
@@ -135,13 +135,13 @@
   <p:extLst>
     <p:ext uri="{521415D9-36F7-43E2-AB2F-B90AF26B5E84}">
       <p14:sectionLst xmlns:p14="http://schemas.microsoft.com/office/powerpoint/2010/main">
-        <p14:section name="Opening" id="{eb80c065-074c-e7f6-fa24-fa652b30f5c5}">
+        <p14:section name="Opening" id="{cee59eec-ce80-ed15-515a-9fc6e88edfc1}">
           <p14:sldIdLst>
             <p14:sldId id="256"/>
             <p14:sldId id="257"/>
           </p14:sldIdLst>
         </p14:section>
-        <p14:section name="AML in CR1" id="{a2333b75-2818-c8dc-7be8-97c493208c7a}">
+        <p14:section name="AML in CR1" id="{8f60c542-a318-14ff-d5ab-dd3d454bd039}">
           <p14:sldIdLst>
             <p14:sldId id="258"/>
             <p14:sldId id="259"/>
@@ -152,14 +152,14 @@
             <p14:sldId id="264"/>
           </p14:sldIdLst>
         </p14:section>
-        <p14:section name="Advanced AML" id="{4101d051-f112-6928-d5f1-55959bb9af72}">
+        <p14:section name="Advanced AML" id="{c68a558d-2b96-ccf6-6a41-320c3a95f693}">
           <p14:sldIdLst>
             <p14:sldId id="265"/>
             <p14:sldId id="266"/>
             <p14:sldId id="267"/>
           </p14:sldIdLst>
         </p14:section>
-        <p14:section name="APL and children" id="{3b6a8721-c71e-110a-7747-d7af37f9b9e2}">
+        <p14:section name="APL and children" id="{ce3b4829-f855-e1a6-b208-b45d37adb3f1}">
           <p14:sldIdLst>
             <p14:sldId id="268"/>
             <p14:sldId id="269"/>
@@ -167,7 +167,7 @@
             <p14:sldId id="271"/>
           </p14:sldIdLst>
         </p14:section>
-        <p14:section name="Board questions" id="{fc41bc2e-065a-282c-f722-cee38bdf9f0b}">
+        <p14:section name="Board questions" id="{c495973d-72eb-cfe3-534d-3d8f0c3dc5ef}">
           <p14:sldIdLst>
             <p14:sldId id="272"/>
             <p14:sldId id="273"/>
@@ -177,7 +177,7 @@
             <p14:sldId id="277"/>
           </p14:sldIdLst>
         </p14:section>
-        <p14:section name="References" id="{2973d131-65b5-3b42-81e6-0a53cb3c2203}">
+        <p14:section name="References" id="{5a02a411-8aec-937c-e919-91f3424d8f17}">
           <p14:sldIdLst>
             <p14:sldId id="278"/>
             <p14:sldId id="279"/>
@@ -185,7 +185,7 @@
             <p14:sldId id="281"/>
           </p14:sldIdLst>
         </p14:section>
-        <p14:section name="Backup" id="{f5d0988e-d8b8-5f5d-fa73-58acfa320414}">
+        <p14:section name="Backup" id="{4e4f652f-be71-d10d-6029-225a80f86321}">
           <p14:sldIdLst>
             <p14:sldId id="282"/>
             <p14:sldId id="283"/>
@@ -3283,7 +3283,7 @@
             </a:pPr>
             <a:r>
               <a:rPr lang="en-US" dirty="0"/>
-              <a:t>這張表最重要的訊息在最下面那行。AML 治療失敗主要是 CR1 之後復發，而不是 induction 失敗或 TRM，所以後面的重點都放在 CR1 之後要怎麼鞏固。</a:t>
+              <a:t>這張表最重要的訊息在下面的 caption。AML 治療失敗主要是 CR1 之後復發，而不是 induction 失敗或 TRM，所以後面的重點都放在 CR1 之後要怎麼鞏固。</a:t>
             </a:r>
           </a:p>
           <a:p>
@@ -5652,14 +5652,14 @@
                         <a:buNone/>
                       </a:pPr>
                       <a:r>
-                        <a:rPr lang="en-US" sz="1600" b="1" dirty="0">
+                        <a:rPr lang="en-US" sz="1700" b="1" dirty="0">
                           <a:solidFill>
                             <a:schemeClr val="tx1"/>
                           </a:solidFill>
                         </a:rPr>
                         <a:t>Issue</a:t>
                       </a:r>
-                      <a:endParaRPr lang="en-US" sz="1600" dirty="0"/>
+                      <a:endParaRPr lang="en-US" sz="1700" dirty="0"/>
                     </a:p>
                   </a:txBody>
                   <a:tcPr marL="25400" marR="101600" marT="63500" marB="63500" anchor="ctr">
@@ -5698,14 +5698,14 @@
                         <a:buNone/>
                       </a:pPr>
                       <a:r>
-                        <a:rPr lang="en-US" sz="1600" b="1" dirty="0">
+                        <a:rPr lang="en-US" sz="1700" b="1" dirty="0">
                           <a:solidFill>
                             <a:schemeClr val="tx1"/>
                           </a:solidFill>
                         </a:rPr>
                         <a:t>Ch. 70 position</a:t>
                       </a:r>
-                      <a:endParaRPr lang="en-US" sz="1600" dirty="0"/>
+                      <a:endParaRPr lang="en-US" sz="1700" dirty="0"/>
                     </a:p>
                   </a:txBody>
                   <a:tcPr marL="25400" marR="101600" marT="63500" marB="63500" anchor="ctr">
@@ -5746,14 +5746,14 @@
                         <a:buNone/>
                       </a:pPr>
                       <a:r>
-                        <a:rPr lang="en-US" sz="1600" dirty="0">
+                        <a:rPr lang="en-US" sz="1700" dirty="0">
                           <a:solidFill>
                             <a:schemeClr val="tx1"/>
                           </a:solidFill>
                         </a:rPr>
                         <a:t>Definition (Ferguson 2016)</a:t>
                       </a:r>
-                      <a:endParaRPr lang="en-US" sz="1600" dirty="0"/>
+                      <a:endParaRPr lang="en-US" sz="1700" dirty="0"/>
                     </a:p>
                   </a:txBody>
                   <a:tcPr marL="25400" marR="101600" marT="63500" marB="63500" anchor="ctr">
@@ -5786,14 +5786,14 @@
                         <a:buNone/>
                       </a:pPr>
                       <a:r>
-                        <a:rPr lang="en-US" sz="1600" dirty="0">
+                        <a:rPr lang="en-US" sz="1700" dirty="0">
                           <a:solidFill>
                             <a:schemeClr val="tx1"/>
                           </a:solidFill>
                         </a:rPr>
                         <a:t>No CR after 2 intensive courses, ≥ 1 with ID cytarabine</a:t>
                       </a:r>
-                      <a:endParaRPr lang="en-US" sz="1600" dirty="0"/>
+                      <a:endParaRPr lang="en-US" sz="1700" dirty="0"/>
                     </a:p>
                   </a:txBody>
                   <a:tcPr marL="25400" marR="101600" marT="63500" marB="63500" anchor="ctr">
@@ -5828,14 +5828,14 @@
                         <a:buNone/>
                       </a:pPr>
                       <a:r>
-                        <a:rPr lang="en-US" sz="1600" dirty="0">
+                        <a:rPr lang="en-US" sz="1700" dirty="0">
                           <a:solidFill>
                             <a:schemeClr val="tx1"/>
                           </a:solidFill>
                         </a:rPr>
                         <a:t>Frequency; chemo-only outcome</a:t>
                       </a:r>
-                      <a:endParaRPr lang="en-US" sz="1600" dirty="0"/>
+                      <a:endParaRPr lang="en-US" sz="1700" dirty="0"/>
                     </a:p>
                   </a:txBody>
                   <a:tcPr marL="25400" marR="101600" marT="63500" marB="63500" anchor="ctr">
@@ -5868,14 +5868,14 @@
                         <a:buNone/>
                       </a:pPr>
                       <a:r>
-                        <a:rPr lang="en-US" sz="1600" dirty="0">
+                        <a:rPr lang="en-US" sz="1700" dirty="0">
                           <a:solidFill>
                             <a:schemeClr val="tx1"/>
                           </a:solidFill>
                         </a:rPr>
                         <a:t>10–40% of adults with new AML; long-term survival &lt; 10%</a:t>
                       </a:r>
-                      <a:endParaRPr lang="en-US" sz="1600" dirty="0"/>
+                      <a:endParaRPr lang="en-US" sz="1700" dirty="0"/>
                     </a:p>
                   </a:txBody>
                   <a:tcPr marL="25400" marR="101600" marT="63500" marB="63500" anchor="ctr">
@@ -5910,14 +5910,14 @@
                         <a:buNone/>
                       </a:pPr>
                       <a:r>
-                        <a:rPr lang="en-US" sz="1600" dirty="0">
+                        <a:rPr lang="en-US" sz="1700" dirty="0">
                           <a:solidFill>
                             <a:schemeClr val="tx1"/>
                           </a:solidFill>
                         </a:rPr>
                         <a:t>Who does best</a:t>
                       </a:r>
-                      <a:endParaRPr lang="en-US" sz="1600" dirty="0"/>
+                      <a:endParaRPr lang="en-US" sz="1700" dirty="0"/>
                     </a:p>
                   </a:txBody>
                   <a:tcPr marL="25400" marR="101600" marT="63500" marB="63500" anchor="ctr">
@@ -5950,14 +5950,14 @@
                         <a:buNone/>
                       </a:pPr>
                       <a:r>
-                        <a:rPr lang="en-US" sz="1600" dirty="0">
+                        <a:rPr lang="en-US" sz="1700" dirty="0">
                           <a:solidFill>
                             <a:schemeClr val="tx1"/>
                           </a:solidFill>
                         </a:rPr>
                         <a:t>Swift HCT after ≤ 2 courses; lower disease burden at HCT</a:t>
                       </a:r>
-                      <a:endParaRPr lang="en-US" sz="1600" dirty="0"/>
+                      <a:endParaRPr lang="en-US" sz="1700" dirty="0"/>
                     </a:p>
                   </a:txBody>
                   <a:tcPr marL="25400" marR="101600" marT="63500" marB="63500" anchor="ctr">
@@ -5992,14 +5992,14 @@
                         <a:buNone/>
                       </a:pPr>
                       <a:r>
-                        <a:rPr lang="en-US" sz="1600" dirty="0">
+                        <a:rPr lang="en-US" sz="1700" dirty="0">
                           <a:solidFill>
                             <a:schemeClr val="tx1"/>
                           </a:solidFill>
                         </a:rPr>
                         <a:t>TP53 mutation or inv(3)</a:t>
                       </a:r>
-                      <a:endParaRPr lang="en-US" sz="1600" dirty="0"/>
+                      <a:endParaRPr lang="en-US" sz="1700" dirty="0"/>
                     </a:p>
                   </a:txBody>
                   <a:tcPr marL="25400" marR="101600" marT="63500" marB="63500" anchor="ctr">
@@ -6032,14 +6032,14 @@
                         <a:buNone/>
                       </a:pPr>
                       <a:r>
-                        <a:rPr lang="en-US" sz="1600" dirty="0">
+                        <a:rPr lang="en-US" sz="1700" dirty="0">
                           <a:solidFill>
                             <a:schemeClr val="tx1"/>
                           </a:solidFill>
                         </a:rPr>
                         <a:t>Very poor outcome; reserve allo-HCT for those in CR</a:t>
                       </a:r>
-                      <a:endParaRPr lang="en-US" sz="1600" dirty="0"/>
+                      <a:endParaRPr lang="en-US" sz="1700" dirty="0"/>
                     </a:p>
                   </a:txBody>
                   <a:tcPr marL="25400" marR="101600" marT="63500" marB="63500" anchor="ctr">
@@ -6074,14 +6074,14 @@
                         <a:buNone/>
                       </a:pPr>
                       <a:r>
-                        <a:rPr lang="en-US" sz="1600" dirty="0">
+                        <a:rPr lang="en-US" sz="1700" dirty="0">
                           <a:solidFill>
                             <a:schemeClr val="tx1"/>
                           </a:solidFill>
                         </a:rPr>
                         <a:t>Conditioning</a:t>
                       </a:r>
-                      <a:endParaRPr lang="en-US" sz="1600" dirty="0"/>
+                      <a:endParaRPr lang="en-US" sz="1700" dirty="0"/>
                     </a:p>
                   </a:txBody>
                   <a:tcPr marL="25400" marR="101600" marT="63500" marB="63500" anchor="ctr">
@@ -6114,14 +6114,14 @@
                         <a:buNone/>
                       </a:pPr>
                       <a:r>
-                        <a:rPr lang="en-US" sz="1600" dirty="0">
+                        <a:rPr lang="en-US" sz="1700" dirty="0">
                           <a:solidFill>
                             <a:schemeClr val="tx1"/>
                           </a:solidFill>
                         </a:rPr>
                         <a:t>MAC if age &lt; 50; no RIC regimen favoured in older adults</a:t>
                       </a:r>
-                      <a:endParaRPr lang="en-US" sz="1600" dirty="0"/>
+                      <a:endParaRPr lang="en-US" sz="1700" dirty="0"/>
                     </a:p>
                   </a:txBody>
                   <a:tcPr marL="25400" marR="101600" marT="63500" marB="63500" anchor="ctr">
@@ -6156,14 +6156,14 @@
                         <a:buNone/>
                       </a:pPr>
                       <a:r>
-                        <a:rPr lang="en-US" sz="1600" dirty="0">
+                        <a:rPr lang="en-US" sz="1700" dirty="0">
                           <a:solidFill>
                             <a:schemeClr val="tx1"/>
                           </a:solidFill>
                         </a:rPr>
                         <a:t>FLAMSA vs FB2 RIC (Craddock 2021)</a:t>
                       </a:r>
-                      <a:endParaRPr lang="en-US" sz="1600" dirty="0"/>
+                      <a:endParaRPr lang="en-US" sz="1700" dirty="0"/>
                     </a:p>
                   </a:txBody>
                   <a:tcPr marL="25400" marR="101600" marT="63500" marB="63500" anchor="ctr">
@@ -6196,14 +6196,14 @@
                         <a:buNone/>
                       </a:pPr>
                       <a:r>
-                        <a:rPr lang="en-US" sz="1600" dirty="0">
+                        <a:rPr lang="en-US" sz="1700" dirty="0">
                           <a:solidFill>
                             <a:schemeClr val="tx1"/>
                           </a:solidFill>
                         </a:rPr>
                         <a:t>No benefit in CR1/CR2; too few PREF patients to judge</a:t>
                       </a:r>
-                      <a:endParaRPr lang="en-US" sz="1600" dirty="0"/>
+                      <a:endParaRPr lang="en-US" sz="1700" dirty="0"/>
                     </a:p>
                   </a:txBody>
                   <a:tcPr marL="25400" marR="101600" marT="63500" marB="63500" anchor="ctr">
@@ -6238,14 +6238,14 @@
                         <a:buNone/>
                       </a:pPr>
                       <a:r>
-                        <a:rPr lang="en-US" sz="1600" dirty="0">
+                        <a:rPr lang="en-US" sz="1700" dirty="0">
                           <a:solidFill>
                             <a:schemeClr val="tx1"/>
                           </a:solidFill>
                         </a:rPr>
                         <a:t>After HCT</a:t>
                       </a:r>
-                      <a:endParaRPr lang="en-US" sz="1600" dirty="0"/>
+                      <a:endParaRPr lang="en-US" sz="1700" dirty="0"/>
                     </a:p>
                   </a:txBody>
                   <a:tcPr marL="25400" marR="101600" marT="63500" marB="63500" anchor="ctr">
@@ -6278,14 +6278,14 @@
                         <a:buNone/>
                       </a:pPr>
                       <a:r>
-                        <a:rPr lang="en-US" sz="1600" dirty="0">
+                        <a:rPr lang="en-US" sz="1700" dirty="0">
                           <a:solidFill>
                             <a:schemeClr val="tx1"/>
                           </a:solidFill>
                         </a:rPr>
                         <a:t>Marrow MRD at day 30–45 to guide IS taper or DLI</a:t>
                       </a:r>
-                      <a:endParaRPr lang="en-US" sz="1600" dirty="0"/>
+                      <a:endParaRPr lang="en-US" sz="1700" dirty="0"/>
                     </a:p>
                   </a:txBody>
                   <a:tcPr marL="25400" marR="101600" marT="63500" marB="63500" anchor="ctr">
@@ -6320,14 +6320,14 @@
                         <a:buNone/>
                       </a:pPr>
                       <a:r>
-                        <a:rPr lang="en-US" sz="1600" dirty="0">
+                        <a:rPr lang="en-US" sz="1700" dirty="0">
                           <a:solidFill>
                             <a:schemeClr val="tx1"/>
                           </a:solidFill>
                         </a:rPr>
                         <a:t>ASAP trial (Stelljes 2022; Ch. 71)</a:t>
                       </a:r>
-                      <a:endParaRPr lang="en-US" sz="1600" dirty="0"/>
+                      <a:endParaRPr lang="en-US" sz="1700" dirty="0"/>
                     </a:p>
                   </a:txBody>
                   <a:tcPr marL="25400" marR="101600" marT="63500" marB="63500" anchor="ctr">
@@ -6360,14 +6360,14 @@
                         <a:buNone/>
                       </a:pPr>
                       <a:r>
-                        <a:rPr lang="en-US" sz="1600" dirty="0">
+                        <a:rPr lang="en-US" sz="1700" dirty="0">
                           <a:solidFill>
                             <a:schemeClr val="tx1"/>
                           </a:solidFill>
                         </a:rPr>
                         <a:t>Sequential conditioning + immediate HCT: LFS like induction</a:t>
                       </a:r>
-                      <a:endParaRPr lang="en-US" sz="1600" dirty="0"/>
+                      <a:endParaRPr lang="en-US" sz="1700" dirty="0"/>
                     </a:p>
                   </a:txBody>
                   <a:tcPr marL="25400" marR="101600" marT="63500" marB="63500" anchor="ctr">
@@ -7917,7 +7917,7 @@
                   <a:schemeClr val="tx1"/>
                 </a:solidFill>
               </a:rPr>
-              <a:t>Ch. 70: consider maintenance or pre-emptive therapy for high-risk, secondary or poor-mutation AML. Drug details: Session 19.</a:t>
+              <a:t>Ch. 70: consider maintenance or pre-emptive therapy in high-risk AML (Session 19).</a:t>
             </a:r>
             <a:endParaRPr lang="en-US" sz="1600" dirty="0"/>
           </a:p>
@@ -10823,7 +10823,7 @@
                   <a:schemeClr val="tx1"/>
                 </a:solidFill>
               </a:rPr>
-              <a:t>Table 70.2. *Ch. 70 does not specify the type. EBMT registry, CR2 (Sanz 2021): OS 82% auto vs 64% allo (p = 0.001); relapse 23% vs 28% (p = 0.3).</a:t>
+              <a:t>Table 70.2. *Type not specified. EBMT, CR2 (Sanz 2021): OS 82% auto vs 64% allo; relapse 23% vs 28%.</a:t>
             </a:r>
             <a:endParaRPr lang="en-US" sz="1600" dirty="0"/>
           </a:p>
@@ -11946,7 +11946,7 @@
                   <a:schemeClr val="tx1"/>
                 </a:solidFill>
               </a:rPr>
-              <a:t>AML SCT-BFM 2007 (BU/CY/MEL): TRM 9% under 12 years vs 31% in older children and teenagers; avoid or use with caution in this age group.</a:t>
+              <a:t>BU/CY/MEL (AML SCT-BFM 2007): TRM 9% under age 12, 31% above; avoid or use with caution in teenagers.</a:t>
             </a:r>
             <a:endParaRPr lang="en-US" sz="1600" dirty="0"/>
           </a:p>
@@ -16156,14 +16156,14 @@
                         <a:buNone/>
                       </a:pPr>
                       <a:r>
-                        <a:rPr lang="en-US" sz="1600" b="1" dirty="0">
+                        <a:rPr lang="en-US" sz="1700" b="1" dirty="0">
                           <a:solidFill>
                             <a:schemeClr val="tx1"/>
                           </a:solidFill>
                         </a:rPr>
                         <a:t>Series</a:t>
                       </a:r>
-                      <a:endParaRPr lang="en-US" sz="1600" dirty="0"/>
+                      <a:endParaRPr lang="en-US" sz="1700" dirty="0"/>
                     </a:p>
                   </a:txBody>
                   <a:tcPr marL="25400" marR="101600" marT="63500" marB="63500" anchor="ctr">
@@ -16202,14 +16202,14 @@
                         <a:buNone/>
                       </a:pPr>
                       <a:r>
-                        <a:rPr lang="en-US" sz="1600" b="1" dirty="0">
+                        <a:rPr lang="en-US" sz="1700" b="1" dirty="0">
                           <a:solidFill>
                             <a:schemeClr val="tx1"/>
                           </a:solidFill>
                         </a:rPr>
                         <a:t>Salvage</a:t>
                       </a:r>
-                      <a:endParaRPr lang="en-US" sz="1600" dirty="0"/>
+                      <a:endParaRPr lang="en-US" sz="1700" dirty="0"/>
                     </a:p>
                   </a:txBody>
                   <a:tcPr marL="25400" marR="101600" marT="63500" marB="63500" anchor="ctr">
@@ -16248,14 +16248,14 @@
                         <a:buNone/>
                       </a:pPr>
                       <a:r>
-                        <a:rPr lang="en-US" sz="1600" b="1" dirty="0">
+                        <a:rPr lang="en-US" sz="1700" b="1" dirty="0">
                           <a:solidFill>
                             <a:schemeClr val="tx1"/>
                           </a:solidFill>
                         </a:rPr>
                         <a:t>n auto / allo</a:t>
                       </a:r>
-                      <a:endParaRPr lang="en-US" sz="1600" dirty="0"/>
+                      <a:endParaRPr lang="en-US" sz="1700" dirty="0"/>
                     </a:p>
                   </a:txBody>
                   <a:tcPr marL="25400" marR="101600" marT="63500" marB="63500" anchor="ctr">
@@ -16294,14 +16294,14 @@
                         <a:buNone/>
                       </a:pPr>
                       <a:r>
-                        <a:rPr lang="en-US" sz="1600" b="1" dirty="0">
+                        <a:rPr lang="en-US" sz="1700" b="1" dirty="0">
                           <a:solidFill>
                             <a:schemeClr val="tx1"/>
                           </a:solidFill>
                         </a:rPr>
                         <a:t>OS, auto vs allo</a:t>
                       </a:r>
-                      <a:endParaRPr lang="en-US" sz="1600" dirty="0"/>
+                      <a:endParaRPr lang="en-US" sz="1700" dirty="0"/>
                     </a:p>
                   </a:txBody>
                   <a:tcPr marL="25400" marR="101600" marT="63500" marB="63500" anchor="ctr">
@@ -16340,14 +16340,14 @@
                         <a:buNone/>
                       </a:pPr>
                       <a:r>
-                        <a:rPr lang="en-US" sz="1600" b="1" dirty="0">
+                        <a:rPr lang="en-US" sz="1700" b="1" dirty="0">
                           <a:solidFill>
                             <a:schemeClr val="tx1"/>
                           </a:solidFill>
                         </a:rPr>
                         <a:t>Relapse, auto vs allo</a:t>
                       </a:r>
-                      <a:endParaRPr lang="en-US" sz="1600" dirty="0"/>
+                      <a:endParaRPr lang="en-US" sz="1700" dirty="0"/>
                     </a:p>
                   </a:txBody>
                   <a:tcPr marL="25400" marR="101600" marT="63500" marB="63500" anchor="ctr">
@@ -16388,14 +16388,14 @@
                         <a:buNone/>
                       </a:pPr>
                       <a:r>
-                        <a:rPr lang="en-US" sz="1600" dirty="0">
+                        <a:rPr lang="en-US" sz="1700" dirty="0">
                           <a:solidFill>
                             <a:schemeClr val="tx1"/>
                           </a:solidFill>
                         </a:rPr>
                         <a:t>Sanz 2007</a:t>
                       </a:r>
-                      <a:endParaRPr lang="en-US" sz="1600" dirty="0"/>
+                      <a:endParaRPr lang="en-US" sz="1700" dirty="0"/>
                     </a:p>
                   </a:txBody>
                   <a:tcPr marL="25400" marR="101600" marT="63500" marB="63500" anchor="ctr">
@@ -16428,14 +16428,14 @@
                         <a:buNone/>
                       </a:pPr>
                       <a:r>
-                        <a:rPr lang="en-US" sz="1600" dirty="0">
+                        <a:rPr lang="en-US" sz="1700" dirty="0">
                           <a:solidFill>
                             <a:schemeClr val="tx1"/>
                           </a:solidFill>
                         </a:rPr>
                         <a:t>ATRA + chemo</a:t>
                       </a:r>
-                      <a:endParaRPr lang="en-US" sz="1600" dirty="0"/>
+                      <a:endParaRPr lang="en-US" sz="1700" dirty="0"/>
                     </a:p>
                   </a:txBody>
                   <a:tcPr marL="25400" marR="101600" marT="63500" marB="63500" anchor="ctr">
@@ -16468,14 +16468,14 @@
                         <a:buNone/>
                       </a:pPr>
                       <a:r>
-                        <a:rPr lang="en-US" sz="1600" dirty="0">
+                        <a:rPr lang="en-US" sz="1700" dirty="0">
                           <a:solidFill>
                             <a:schemeClr val="tx1"/>
                           </a:solidFill>
                         </a:rPr>
                         <a:t>195 / 137</a:t>
                       </a:r>
-                      <a:endParaRPr lang="en-US" sz="1600" dirty="0"/>
+                      <a:endParaRPr lang="en-US" sz="1700" dirty="0"/>
                     </a:p>
                   </a:txBody>
                   <a:tcPr marL="25400" marR="101600" marT="63500" marB="63500" anchor="ctr">
@@ -16508,14 +16508,14 @@
                         <a:buNone/>
                       </a:pPr>
                       <a:r>
-                        <a:rPr lang="en-US" sz="1600" dirty="0">
+                        <a:rPr lang="en-US" sz="1700" dirty="0">
                           <a:solidFill>
                             <a:schemeClr val="tx1"/>
                           </a:solidFill>
                         </a:rPr>
                         <a:t>51%* vs 59%</a:t>
                       </a:r>
-                      <a:endParaRPr lang="en-US" sz="1600" dirty="0"/>
+                      <a:endParaRPr lang="en-US" sz="1700" dirty="0"/>
                     </a:p>
                   </a:txBody>
                   <a:tcPr marL="25400" marR="101600" marT="63500" marB="63500" anchor="ctr">
@@ -16548,14 +16548,14 @@
                         <a:buNone/>
                       </a:pPr>
                       <a:r>
-                        <a:rPr lang="en-US" sz="1600" dirty="0">
+                        <a:rPr lang="en-US" sz="1700" dirty="0">
                           <a:solidFill>
                             <a:schemeClr val="tx1"/>
                           </a:solidFill>
                         </a:rPr>
                         <a:t>37% vs 17%</a:t>
                       </a:r>
-                      <a:endParaRPr lang="en-US" sz="1600" dirty="0"/>
+                      <a:endParaRPr lang="en-US" sz="1700" dirty="0"/>
                     </a:p>
                   </a:txBody>
                   <a:tcPr marL="25400" marR="101600" marT="63500" marB="63500" anchor="ctr">
@@ -16590,14 +16590,14 @@
                         <a:buNone/>
                       </a:pPr>
                       <a:r>
-                        <a:rPr lang="en-US" sz="1600" dirty="0">
+                        <a:rPr lang="en-US" sz="1700" dirty="0">
                           <a:solidFill>
                             <a:schemeClr val="tx1"/>
                           </a:solidFill>
                         </a:rPr>
                         <a:t>Holter Chakrabarty 2014</a:t>
                       </a:r>
-                      <a:endParaRPr lang="en-US" sz="1600" dirty="0"/>
+                      <a:endParaRPr lang="en-US" sz="1700" dirty="0"/>
                     </a:p>
                   </a:txBody>
                   <a:tcPr marL="25400" marR="101600" marT="63500" marB="63500" anchor="ctr">
@@ -16630,14 +16630,14 @@
                         <a:buNone/>
                       </a:pPr>
                       <a:r>
-                        <a:rPr lang="en-US" sz="1600" dirty="0">
+                        <a:rPr lang="en-US" sz="1700" dirty="0">
                           <a:solidFill>
                             <a:schemeClr val="tx1"/>
                           </a:solidFill>
                         </a:rPr>
                         <a:t>NA</a:t>
                       </a:r>
-                      <a:endParaRPr lang="en-US" sz="1600" dirty="0"/>
+                      <a:endParaRPr lang="en-US" sz="1700" dirty="0"/>
                     </a:p>
                   </a:txBody>
                   <a:tcPr marL="25400" marR="101600" marT="63500" marB="63500" anchor="ctr">
@@ -16670,14 +16670,14 @@
                         <a:buNone/>
                       </a:pPr>
                       <a:r>
-                        <a:rPr lang="en-US" sz="1600" dirty="0">
+                        <a:rPr lang="en-US" sz="1700" dirty="0">
                           <a:solidFill>
                             <a:schemeClr val="tx1"/>
                           </a:solidFill>
                         </a:rPr>
                         <a:t>62 / 232</a:t>
                       </a:r>
-                      <a:endParaRPr lang="en-US" sz="1600" dirty="0"/>
+                      <a:endParaRPr lang="en-US" sz="1700" dirty="0"/>
                     </a:p>
                   </a:txBody>
                   <a:tcPr marL="25400" marR="101600" marT="63500" marB="63500" anchor="ctr">
@@ -16710,14 +16710,14 @@
                         <a:buNone/>
                       </a:pPr>
                       <a:r>
-                        <a:rPr lang="en-US" sz="1600" dirty="0">
+                        <a:rPr lang="en-US" sz="1700" dirty="0">
                           <a:solidFill>
                             <a:schemeClr val="tx1"/>
                           </a:solidFill>
                         </a:rPr>
                         <a:t>75 vs 54% (p = 0.002)</a:t>
                       </a:r>
-                      <a:endParaRPr lang="en-US" sz="1600" dirty="0"/>
+                      <a:endParaRPr lang="en-US" sz="1700" dirty="0"/>
                     </a:p>
                   </a:txBody>
                   <a:tcPr marL="25400" marR="101600" marT="63500" marB="63500" anchor="ctr">
@@ -16750,14 +16750,14 @@
                         <a:buNone/>
                       </a:pPr>
                       <a:r>
-                        <a:rPr lang="en-US" sz="1600" dirty="0">
+                        <a:rPr lang="en-US" sz="1700" dirty="0">
                           <a:solidFill>
                             <a:schemeClr val="tx1"/>
                           </a:solidFill>
                         </a:rPr>
                         <a:t>30 vs 18% (p = 0.4)</a:t>
                       </a:r>
-                      <a:endParaRPr lang="en-US" sz="1600" dirty="0"/>
+                      <a:endParaRPr lang="en-US" sz="1700" dirty="0"/>
                     </a:p>
                   </a:txBody>
                   <a:tcPr marL="25400" marR="101600" marT="63500" marB="63500" anchor="ctr">
@@ -16792,14 +16792,14 @@
                         <a:buNone/>
                       </a:pPr>
                       <a:r>
-                        <a:rPr lang="en-US" sz="1600" dirty="0">
+                        <a:rPr lang="en-US" sz="1700" dirty="0">
                           <a:solidFill>
                             <a:schemeClr val="tx1"/>
                           </a:solidFill>
                         </a:rPr>
                         <a:t>Lengfelder 2015</a:t>
                       </a:r>
-                      <a:endParaRPr lang="en-US" sz="1600" dirty="0"/>
+                      <a:endParaRPr lang="en-US" sz="1700" dirty="0"/>
                     </a:p>
                   </a:txBody>
                   <a:tcPr marL="25400" marR="101600" marT="63500" marB="63500" anchor="ctr">
@@ -16832,14 +16832,14 @@
                         <a:buNone/>
                       </a:pPr>
                       <a:r>
-                        <a:rPr lang="en-US" sz="1600" dirty="0">
+                        <a:rPr lang="en-US" sz="1700" dirty="0">
                           <a:solidFill>
                             <a:schemeClr val="tx1"/>
                           </a:solidFill>
                         </a:rPr>
                         <a:t>ATO-based</a:t>
                       </a:r>
-                      <a:endParaRPr lang="en-US" sz="1600" dirty="0"/>
+                      <a:endParaRPr lang="en-US" sz="1700" dirty="0"/>
                     </a:p>
                   </a:txBody>
                   <a:tcPr marL="25400" marR="101600" marT="63500" marB="63500" anchor="ctr">
@@ -16872,14 +16872,14 @@
                         <a:buNone/>
                       </a:pPr>
                       <a:r>
-                        <a:rPr lang="en-US" sz="1600" dirty="0">
+                        <a:rPr lang="en-US" sz="1700" dirty="0">
                           <a:solidFill>
                             <a:schemeClr val="tx1"/>
                           </a:solidFill>
                         </a:rPr>
                         <a:t>60 / 33</a:t>
                       </a:r>
-                      <a:endParaRPr lang="en-US" sz="1600" dirty="0"/>
+                      <a:endParaRPr lang="en-US" sz="1700" dirty="0"/>
                     </a:p>
                   </a:txBody>
                   <a:tcPr marL="25400" marR="101600" marT="63500" marB="63500" anchor="ctr">
@@ -16912,14 +16912,14 @@
                         <a:buNone/>
                       </a:pPr>
                       <a:r>
-                        <a:rPr lang="en-US" sz="1600" dirty="0">
+                        <a:rPr lang="en-US" sz="1700" dirty="0">
                           <a:solidFill>
                             <a:schemeClr val="tx1"/>
                           </a:solidFill>
                         </a:rPr>
                         <a:t>77 vs 79% (NS)</a:t>
                       </a:r>
-                      <a:endParaRPr lang="en-US" sz="1600" dirty="0"/>
+                      <a:endParaRPr lang="en-US" sz="1700" dirty="0"/>
                     </a:p>
                   </a:txBody>
                   <a:tcPr marL="25400" marR="101600" marT="63500" marB="63500" anchor="ctr">
@@ -16952,14 +16952,14 @@
                         <a:buNone/>
                       </a:pPr>
                       <a:r>
-                        <a:rPr lang="en-US" sz="1600" dirty="0">
+                        <a:rPr lang="en-US" sz="1700" dirty="0">
                           <a:solidFill>
                             <a:schemeClr val="tx1"/>
                           </a:solidFill>
                         </a:rPr>
                         <a:t>37 vs 39% (NS)</a:t>
                       </a:r>
-                      <a:endParaRPr lang="en-US" sz="1600" dirty="0"/>
+                      <a:endParaRPr lang="en-US" sz="1700" dirty="0"/>
                     </a:p>
                   </a:txBody>
                   <a:tcPr marL="25400" marR="101600" marT="63500" marB="63500" anchor="ctr">
@@ -16994,14 +16994,14 @@
                         <a:buNone/>
                       </a:pPr>
                       <a:r>
-                        <a:rPr lang="en-US" sz="1600" dirty="0">
+                        <a:rPr lang="en-US" sz="1700" dirty="0">
                           <a:solidFill>
                             <a:schemeClr val="tx1"/>
                           </a:solidFill>
                         </a:rPr>
                         <a:t>Sanz 2021 (EBMT)</a:t>
                       </a:r>
-                      <a:endParaRPr lang="en-US" sz="1600" dirty="0"/>
+                      <a:endParaRPr lang="en-US" sz="1700" dirty="0"/>
                     </a:p>
                   </a:txBody>
                   <a:tcPr marL="25400" marR="101600" marT="63500" marB="63500" anchor="ctr">
@@ -17034,14 +17034,14 @@
                         <a:buNone/>
                       </a:pPr>
                       <a:r>
-                        <a:rPr lang="en-US" sz="1600" dirty="0">
+                        <a:rPr lang="en-US" sz="1700" dirty="0">
                           <a:solidFill>
                             <a:schemeClr val="tx1"/>
                           </a:solidFill>
                         </a:rPr>
                         <a:t>NA</a:t>
                       </a:r>
-                      <a:endParaRPr lang="en-US" sz="1600" dirty="0"/>
+                      <a:endParaRPr lang="en-US" sz="1700" dirty="0"/>
                     </a:p>
                   </a:txBody>
                   <a:tcPr marL="25400" marR="101600" marT="63500" marB="63500" anchor="ctr">
@@ -17074,14 +17074,14 @@
                         <a:buNone/>
                       </a:pPr>
                       <a:r>
-                        <a:rPr lang="en-US" sz="1600" dirty="0">
+                        <a:rPr lang="en-US" sz="1700" dirty="0">
                           <a:solidFill>
                             <a:schemeClr val="tx1"/>
                           </a:solidFill>
                         </a:rPr>
                         <a:t>341 / 228</a:t>
                       </a:r>
-                      <a:endParaRPr lang="en-US" sz="1600" dirty="0"/>
+                      <a:endParaRPr lang="en-US" sz="1700" dirty="0"/>
                     </a:p>
                   </a:txBody>
                   <a:tcPr marL="25400" marR="101600" marT="63500" marB="63500" anchor="ctr">
@@ -17114,14 +17114,14 @@
                         <a:buNone/>
                       </a:pPr>
                       <a:r>
-                        <a:rPr lang="en-US" sz="1600" dirty="0">
+                        <a:rPr lang="en-US" sz="1700" dirty="0">
                           <a:solidFill>
                             <a:schemeClr val="tx1"/>
                           </a:solidFill>
                         </a:rPr>
                         <a:t>82 vs 64% (p = 0.001)</a:t>
                       </a:r>
-                      <a:endParaRPr lang="en-US" sz="1600" dirty="0"/>
+                      <a:endParaRPr lang="en-US" sz="1700" dirty="0"/>
                     </a:p>
                   </a:txBody>
                   <a:tcPr marL="25400" marR="101600" marT="63500" marB="63500" anchor="ctr">
@@ -17154,14 +17154,14 @@
                         <a:buNone/>
                       </a:pPr>
                       <a:r>
-                        <a:rPr lang="en-US" sz="1600" dirty="0">
+                        <a:rPr lang="en-US" sz="1700" dirty="0">
                           <a:solidFill>
                             <a:schemeClr val="tx1"/>
                           </a:solidFill>
                         </a:rPr>
                         <a:t>23 vs 28% (p = 0.3)</a:t>
                       </a:r>
-                      <a:endParaRPr lang="en-US" sz="1600" dirty="0"/>
+                      <a:endParaRPr lang="en-US" sz="1700" dirty="0"/>
                     </a:p>
                   </a:txBody>
                   <a:tcPr marL="25400" marR="101600" marT="63500" marB="63500" anchor="ctr">
@@ -17447,14 +17447,14 @@
                         <a:buNone/>
                       </a:pPr>
                       <a:r>
-                        <a:rPr lang="en-US" sz="1600" b="1" dirty="0">
+                        <a:rPr lang="en-US" sz="1700" b="1" dirty="0">
                           <a:solidFill>
                             <a:schemeClr val="tx1"/>
                           </a:solidFill>
                         </a:rPr>
                         <a:t>Method</a:t>
                       </a:r>
-                      <a:endParaRPr lang="en-US" sz="1600" dirty="0"/>
+                      <a:endParaRPr lang="en-US" sz="1700" dirty="0"/>
                     </a:p>
                   </a:txBody>
                   <a:tcPr marL="25400" marR="101600" marT="63500" marB="63500" anchor="ctr">
@@ -17493,14 +17493,14 @@
                         <a:buNone/>
                       </a:pPr>
                       <a:r>
-                        <a:rPr lang="en-US" sz="1600" b="1" dirty="0">
+                        <a:rPr lang="en-US" sz="1700" b="1" dirty="0">
                           <a:solidFill>
                             <a:schemeClr val="tx1"/>
                           </a:solidFill>
                         </a:rPr>
                         <a:t>Strength</a:t>
                       </a:r>
-                      <a:endParaRPr lang="en-US" sz="1600" dirty="0"/>
+                      <a:endParaRPr lang="en-US" sz="1700" dirty="0"/>
                     </a:p>
                   </a:txBody>
                   <a:tcPr marL="25400" marR="101600" marT="63500" marB="63500" anchor="ctr">
@@ -17539,14 +17539,14 @@
                         <a:buNone/>
                       </a:pPr>
                       <a:r>
-                        <a:rPr lang="en-US" sz="1600" b="1" dirty="0">
+                        <a:rPr lang="en-US" sz="1700" b="1" dirty="0">
                           <a:solidFill>
                             <a:schemeClr val="tx1"/>
                           </a:solidFill>
                         </a:rPr>
                         <a:t>Limitation</a:t>
                       </a:r>
-                      <a:endParaRPr lang="en-US" sz="1600" dirty="0"/>
+                      <a:endParaRPr lang="en-US" sz="1700" dirty="0"/>
                     </a:p>
                   </a:txBody>
                   <a:tcPr marL="25400" marR="101600" marT="63500" marB="63500" anchor="ctr">
@@ -17587,14 +17587,14 @@
                         <a:buNone/>
                       </a:pPr>
                       <a:r>
-                        <a:rPr lang="en-US" sz="1600" dirty="0">
+                        <a:rPr lang="en-US" sz="1700" dirty="0">
                           <a:solidFill>
                             <a:schemeClr val="tx1"/>
                           </a:solidFill>
                         </a:rPr>
                         <a:t>Karyotype t(15;17)(q22;q21)</a:t>
                       </a:r>
-                      <a:endParaRPr lang="en-US" sz="1600" dirty="0"/>
+                      <a:endParaRPr lang="en-US" sz="1700" dirty="0"/>
                     </a:p>
                   </a:txBody>
                   <a:tcPr marL="25400" marR="101600" marT="63500" marB="63500" anchor="ctr">
@@ -17627,14 +17627,14 @@
                         <a:buNone/>
                       </a:pPr>
                       <a:r>
-                        <a:rPr lang="en-US" sz="1600" dirty="0">
+                        <a:rPr lang="en-US" sz="1700" dirty="0">
                           <a:solidFill>
                             <a:schemeClr val="tx1"/>
                           </a:solidFill>
                         </a:rPr>
                         <a:t>Very specific; extra anomalies in 30% (+8 most often)</a:t>
                       </a:r>
-                      <a:endParaRPr lang="en-US" sz="1600" dirty="0"/>
+                      <a:endParaRPr lang="en-US" sz="1700" dirty="0"/>
                     </a:p>
                   </a:txBody>
                   <a:tcPr marL="25400" marR="101600" marT="63500" marB="63500" anchor="ctr">
@@ -17667,14 +17667,14 @@
                         <a:buNone/>
                       </a:pPr>
                       <a:r>
-                        <a:rPr lang="en-US" sz="1600" dirty="0">
+                        <a:rPr lang="en-US" sz="1700" dirty="0">
                           <a:solidFill>
                             <a:schemeClr val="tx1"/>
                           </a:solidFill>
                         </a:rPr>
                         <a:t>Sensitivity 80%; false-negative in 20%</a:t>
                       </a:r>
-                      <a:endParaRPr lang="en-US" sz="1600" dirty="0"/>
+                      <a:endParaRPr lang="en-US" sz="1700" dirty="0"/>
                     </a:p>
                   </a:txBody>
                   <a:tcPr marL="25400" marR="101600" marT="63500" marB="63500" anchor="ctr">
@@ -17709,14 +17709,14 @@
                         <a:buNone/>
                       </a:pPr>
                       <a:r>
-                        <a:rPr lang="en-US" sz="1600" dirty="0">
+                        <a:rPr lang="en-US" sz="1700" dirty="0">
                           <a:solidFill>
                             <a:schemeClr val="tx1"/>
                           </a:solidFill>
                         </a:rPr>
                         <a:t>FISH PML-RARA</a:t>
                       </a:r>
-                      <a:endParaRPr lang="en-US" sz="1600" dirty="0"/>
+                      <a:endParaRPr lang="en-US" sz="1700" dirty="0"/>
                     </a:p>
                   </a:txBody>
                   <a:tcPr marL="25400" marR="101600" marT="63500" marB="63500" anchor="ctr">
@@ -17749,14 +17749,14 @@
                         <a:buNone/>
                       </a:pPr>
                       <a:r>
-                        <a:rPr lang="en-US" sz="1600" dirty="0">
+                        <a:rPr lang="en-US" sz="1700" dirty="0">
                           <a:solidFill>
                             <a:schemeClr val="tx1"/>
                           </a:solidFill>
                         </a:rPr>
                         <a:t>Very specific and rapid</a:t>
                       </a:r>
-                      <a:endParaRPr lang="en-US" sz="1600" dirty="0"/>
+                      <a:endParaRPr lang="en-US" sz="1700" dirty="0"/>
                     </a:p>
                   </a:txBody>
                   <a:tcPr marL="25400" marR="101600" marT="63500" marB="63500" anchor="ctr">
@@ -17789,14 +17789,14 @@
                         <a:buNone/>
                       </a:pPr>
                       <a:r>
-                        <a:rPr lang="en-US" sz="1600" dirty="0">
+                        <a:rPr lang="en-US" sz="1700" dirty="0">
                           <a:solidFill>
                             <a:schemeClr val="tx1"/>
                           </a:solidFill>
                         </a:rPr>
                         <a:t>Not very sensitive; no isoform</a:t>
                       </a:r>
-                      <a:endParaRPr lang="en-US" sz="1600" dirty="0"/>
+                      <a:endParaRPr lang="en-US" sz="1700" dirty="0"/>
                     </a:p>
                   </a:txBody>
                   <a:tcPr marL="25400" marR="101600" marT="63500" marB="63500" anchor="ctr">
@@ -17831,14 +17831,14 @@
                         <a:buNone/>
                       </a:pPr>
                       <a:r>
-                        <a:rPr lang="en-US" sz="1600" dirty="0">
+                        <a:rPr lang="en-US" sz="1700" dirty="0">
                           <a:solidFill>
                             <a:schemeClr val="tx1"/>
                           </a:solidFill>
                         </a:rPr>
                         <a:t>RT-PCR</a:t>
                       </a:r>
-                      <a:endParaRPr lang="en-US" sz="1600" dirty="0"/>
+                      <a:endParaRPr lang="en-US" sz="1700" dirty="0"/>
                     </a:p>
                   </a:txBody>
                   <a:tcPr marL="25400" marR="101600" marT="63500" marB="63500" anchor="ctr">
@@ -17871,14 +17871,14 @@
                         <a:buNone/>
                       </a:pPr>
                       <a:r>
-                        <a:rPr lang="en-US" sz="1600" dirty="0">
+                        <a:rPr lang="en-US" sz="1700" dirty="0">
                           <a:solidFill>
                             <a:schemeClr val="tx1"/>
                           </a:solidFill>
                         </a:rPr>
                         <a:t>Specific, rapid, sensitive; isoform allows MRD</a:t>
                       </a:r>
-                      <a:endParaRPr lang="en-US" sz="1600" dirty="0"/>
+                      <a:endParaRPr lang="en-US" sz="1700" dirty="0"/>
                     </a:p>
                   </a:txBody>
                   <a:tcPr marL="25400" marR="101600" marT="63500" marB="63500" anchor="ctr">
@@ -17911,14 +17911,14 @@
                         <a:buNone/>
                       </a:pPr>
                       <a:r>
-                        <a:rPr lang="en-US" sz="1600" dirty="0">
+                        <a:rPr lang="en-US" sz="1700" dirty="0">
                           <a:solidFill>
                             <a:schemeClr val="tx1"/>
                           </a:solidFill>
                         </a:rPr>
                         <a:t>Occasional artefacts and contamination</a:t>
                       </a:r>
-                      <a:endParaRPr lang="en-US" sz="1600" dirty="0"/>
+                      <a:endParaRPr lang="en-US" sz="1700" dirty="0"/>
                     </a:p>
                   </a:txBody>
                   <a:tcPr marL="25400" marR="101600" marT="63500" marB="63500" anchor="ctr">
@@ -17953,14 +17953,14 @@
                         <a:buNone/>
                       </a:pPr>
                       <a:r>
-                        <a:rPr lang="en-US" sz="1600" dirty="0">
+                        <a:rPr lang="en-US" sz="1700" dirty="0">
                           <a:solidFill>
                             <a:schemeClr val="tx1"/>
                           </a:solidFill>
                         </a:rPr>
                         <a:t>Anti-PML (PG-M3) staining</a:t>
                       </a:r>
-                      <a:endParaRPr lang="en-US" sz="1600" dirty="0"/>
+                      <a:endParaRPr lang="en-US" sz="1700" dirty="0"/>
                     </a:p>
                   </a:txBody>
                   <a:tcPr marL="25400" marR="101600" marT="63500" marB="63500" anchor="ctr">
@@ -17993,14 +17993,14 @@
                         <a:buNone/>
                       </a:pPr>
                       <a:r>
-                        <a:rPr lang="en-US" sz="1600" dirty="0">
+                        <a:rPr lang="en-US" sz="1700" dirty="0">
                           <a:solidFill>
                             <a:schemeClr val="tx1"/>
                           </a:solidFill>
                         </a:rPr>
                         <a:t>Specific, rapid, cheap; microspeckled pattern</a:t>
                       </a:r>
-                      <a:endParaRPr lang="en-US" sz="1600" dirty="0"/>
+                      <a:endParaRPr lang="en-US" sz="1700" dirty="0"/>
                     </a:p>
                   </a:txBody>
                   <a:tcPr marL="25400" marR="101600" marT="63500" marB="63500" anchor="ctr">
@@ -18033,14 +18033,14 @@
                         <a:buNone/>
                       </a:pPr>
                       <a:r>
-                        <a:rPr lang="en-US" sz="1600" dirty="0">
+                        <a:rPr lang="en-US" sz="1700" dirty="0">
                           <a:solidFill>
                             <a:schemeClr val="tx1"/>
                           </a:solidFill>
                         </a:rPr>
                         <a:t>No isoform</a:t>
                       </a:r>
-                      <a:endParaRPr lang="en-US" sz="1600" dirty="0"/>
+                      <a:endParaRPr lang="en-US" sz="1700" dirty="0"/>
                     </a:p>
                   </a:txBody>
                   <a:tcPr marL="25400" marR="101600" marT="63500" marB="63500" anchor="ctr">
@@ -18075,14 +18075,14 @@
                         <a:buNone/>
                       </a:pPr>
                       <a:r>
-                        <a:rPr lang="en-US" sz="1600" dirty="0">
+                        <a:rPr lang="en-US" sz="1700" dirty="0">
                           <a:solidFill>
                             <a:schemeClr val="tx1"/>
                           </a:solidFill>
                         </a:rPr>
                         <a:t>Variant RARA partners</a:t>
                       </a:r>
-                      <a:endParaRPr lang="en-US" sz="1600" dirty="0"/>
+                      <a:endParaRPr lang="en-US" sz="1700" dirty="0"/>
                     </a:p>
                   </a:txBody>
                   <a:tcPr marL="25400" marR="101600" marT="63500" marB="63500" anchor="ctr">
@@ -18115,14 +18115,14 @@
                         <a:buNone/>
                       </a:pPr>
                       <a:r>
-                        <a:rPr lang="en-US" sz="1600" dirty="0">
+                        <a:rPr lang="en-US" sz="1700" dirty="0">
                           <a:solidFill>
                             <a:schemeClr val="tx1"/>
                           </a:solidFill>
                         </a:rPr>
                         <a:t>ZBTB16 (PLZF)::RARA; STAT5B::RARA</a:t>
                       </a:r>
-                      <a:endParaRPr lang="en-US" sz="1600" dirty="0"/>
+                      <a:endParaRPr lang="en-US" sz="1700" dirty="0"/>
                     </a:p>
                   </a:txBody>
                   <a:tcPr marL="25400" marR="101600" marT="63500" marB="63500" anchor="ctr">
@@ -18155,14 +18155,14 @@
                         <a:buNone/>
                       </a:pPr>
                       <a:r>
-                        <a:rPr lang="en-US" sz="1600" dirty="0">
+                        <a:rPr lang="en-US" sz="1700" dirty="0">
                           <a:solidFill>
                             <a:schemeClr val="tx1"/>
                           </a:solidFill>
                         </a:rPr>
                         <a:t>ATRA-resistant</a:t>
                       </a:r>
-                      <a:endParaRPr lang="en-US" sz="1600" dirty="0"/>
+                      <a:endParaRPr lang="en-US" sz="1700" dirty="0"/>
                     </a:p>
                   </a:txBody>
                   <a:tcPr marL="25400" marR="101600" marT="63500" marB="63500" anchor="ctr">
@@ -18411,14 +18411,14 @@
                         <a:buNone/>
                       </a:pPr>
                       <a:r>
-                        <a:rPr lang="en-US" sz="1600" b="1" dirty="0">
+                        <a:rPr lang="en-US" sz="1700" b="1" dirty="0">
                           <a:solidFill>
                             <a:schemeClr val="tx1"/>
                           </a:solidFill>
                         </a:rPr>
                         <a:t>Group</a:t>
                       </a:r>
-                      <a:endParaRPr lang="en-US" sz="1600" dirty="0"/>
+                      <a:endParaRPr lang="en-US" sz="1700" dirty="0"/>
                     </a:p>
                   </a:txBody>
                   <a:tcPr marL="25400" marR="101600" marT="63500" marB="63500" anchor="ctr">
@@ -18457,14 +18457,14 @@
                         <a:buNone/>
                       </a:pPr>
                       <a:r>
-                        <a:rPr lang="en-US" sz="1600" b="1" dirty="0">
+                        <a:rPr lang="en-US" sz="1700" b="1" dirty="0">
                           <a:solidFill>
                             <a:schemeClr val="tx1"/>
                           </a:solidFill>
                         </a:rPr>
                         <a:t>Abnormalities considered poor risk (Ch. 71)</a:t>
                       </a:r>
-                      <a:endParaRPr lang="en-US" sz="1600" dirty="0"/>
+                      <a:endParaRPr lang="en-US" sz="1700" dirty="0"/>
                     </a:p>
                   </a:txBody>
                   <a:tcPr marL="25400" marR="101600" marT="63500" marB="63500" anchor="ctr">
@@ -18505,14 +18505,14 @@
                         <a:buNone/>
                       </a:pPr>
                       <a:r>
-                        <a:rPr lang="en-US" sz="1600" dirty="0">
+                        <a:rPr lang="en-US" sz="1700" dirty="0">
                           <a:solidFill>
                             <a:schemeClr val="tx1"/>
                           </a:solidFill>
                         </a:rPr>
                         <a:t>MECOM</a:t>
                       </a:r>
-                      <a:endParaRPr lang="en-US" sz="1600" dirty="0"/>
+                      <a:endParaRPr lang="en-US" sz="1700" dirty="0"/>
                     </a:p>
                   </a:txBody>
                   <a:tcPr marL="25400" marR="101600" marT="63500" marB="63500" anchor="ctr">
@@ -18545,14 +18545,14 @@
                         <a:buNone/>
                       </a:pPr>
                       <a:r>
-                        <a:rPr lang="en-US" sz="1600" dirty="0">
+                        <a:rPr lang="en-US" sz="1700" dirty="0">
                           <a:solidFill>
                             <a:schemeClr val="tx1"/>
                           </a:solidFill>
                         </a:rPr>
                         <a:t>inv(3)(q21q26), t(3;3)(q21;q26), abn(3q26)</a:t>
                       </a:r>
-                      <a:endParaRPr lang="en-US" sz="1600" dirty="0"/>
+                      <a:endParaRPr lang="en-US" sz="1700" dirty="0"/>
                     </a:p>
                   </a:txBody>
                   <a:tcPr marL="25400" marR="101600" marT="63500" marB="63500" anchor="ctr">
@@ -18587,14 +18587,14 @@
                         <a:buNone/>
                       </a:pPr>
                       <a:r>
-                        <a:rPr lang="en-US" sz="1600" dirty="0">
+                        <a:rPr lang="en-US" sz="1700" dirty="0">
                           <a:solidFill>
                             <a:schemeClr val="tx1"/>
                           </a:solidFill>
                         </a:rPr>
                         <a:t>Monosomies</a:t>
                       </a:r>
-                      <a:endParaRPr lang="en-US" sz="1600" dirty="0"/>
+                      <a:endParaRPr lang="en-US" sz="1700" dirty="0"/>
                     </a:p>
                   </a:txBody>
                   <a:tcPr marL="25400" marR="101600" marT="63500" marB="63500" anchor="ctr">
@@ -18627,14 +18627,14 @@
                         <a:buNone/>
                       </a:pPr>
                       <a:r>
-                        <a:rPr lang="en-US" sz="1600" dirty="0">
+                        <a:rPr lang="en-US" sz="1700" dirty="0">
                           <a:solidFill>
                             <a:schemeClr val="tx1"/>
                           </a:solidFill>
                         </a:rPr>
                         <a:t>−5/del(5q); −7</a:t>
                       </a:r>
-                      <a:endParaRPr lang="en-US" sz="1600" dirty="0"/>
+                      <a:endParaRPr lang="en-US" sz="1700" dirty="0"/>
                     </a:p>
                   </a:txBody>
                   <a:tcPr marL="25400" marR="101600" marT="63500" marB="63500" anchor="ctr">
@@ -18669,14 +18669,14 @@
                         <a:buNone/>
                       </a:pPr>
                       <a:r>
-                        <a:rPr lang="en-US" sz="1600" dirty="0">
+                        <a:rPr lang="en-US" sz="1700" dirty="0">
                           <a:solidFill>
                             <a:schemeClr val="tx1"/>
                           </a:solidFill>
                         </a:rPr>
                         <a:t>Fusions</a:t>
                       </a:r>
-                      <a:endParaRPr lang="en-US" sz="1600" dirty="0"/>
+                      <a:endParaRPr lang="en-US" sz="1700" dirty="0"/>
                     </a:p>
                   </a:txBody>
                   <a:tcPr marL="25400" marR="101600" marT="63500" marB="63500" anchor="ctr">
@@ -18709,14 +18709,14 @@
                         <a:buNone/>
                       </a:pPr>
                       <a:r>
-                        <a:rPr lang="en-US" sz="1600" dirty="0">
+                        <a:rPr lang="en-US" sz="1700" dirty="0">
                           <a:solidFill>
                             <a:schemeClr val="tx1"/>
                           </a:solidFill>
                         </a:rPr>
                         <a:t>t(6;9) DEK::NUP214; t(9;22) BCR::ABL1; t(7;12) MNX1::ETV6</a:t>
                       </a:r>
-                      <a:endParaRPr lang="en-US" sz="1600" dirty="0"/>
+                      <a:endParaRPr lang="en-US" sz="1700" dirty="0"/>
                     </a:p>
                   </a:txBody>
                   <a:tcPr marL="25400" marR="101600" marT="63500" marB="63500" anchor="ctr">
@@ -18751,14 +18751,14 @@
                         <a:buNone/>
                       </a:pPr>
                       <a:r>
-                        <a:rPr lang="en-US" sz="1600" dirty="0">
+                        <a:rPr lang="en-US" sz="1700" dirty="0">
                           <a:solidFill>
                             <a:schemeClr val="tx1"/>
                           </a:solidFill>
                         </a:rPr>
                         <a:t>KMT2A partners</a:t>
                       </a:r>
-                      <a:endParaRPr lang="en-US" sz="1600" dirty="0"/>
+                      <a:endParaRPr lang="en-US" sz="1700" dirty="0"/>
                     </a:p>
                   </a:txBody>
                   <a:tcPr marL="25400" marR="101600" marT="63500" marB="63500" anchor="ctr">
@@ -18791,14 +18791,14 @@
                         <a:buNone/>
                       </a:pPr>
                       <a:r>
-                        <a:rPr lang="en-US" sz="1600" dirty="0">
+                        <a:rPr lang="en-US" sz="1700" dirty="0">
                           <a:solidFill>
                             <a:schemeClr val="tx1"/>
                           </a:solidFill>
                         </a:rPr>
                         <a:t>t(6;11) MLLT4; t(4;11) AFF1; t(10;11) MLLT10 or ABI1</a:t>
                       </a:r>
-                      <a:endParaRPr lang="en-US" sz="1600" dirty="0"/>
+                      <a:endParaRPr lang="en-US" sz="1700" dirty="0"/>
                     </a:p>
                   </a:txBody>
                   <a:tcPr marL="25400" marR="101600" marT="63500" marB="63500" anchor="ctr">
@@ -18833,14 +18833,14 @@
                         <a:buNone/>
                       </a:pPr>
                       <a:r>
-                        <a:rPr lang="en-US" sz="1600" dirty="0">
+                        <a:rPr lang="en-US" sz="1700" dirty="0">
                           <a:solidFill>
                             <a:schemeClr val="tx1"/>
                           </a:solidFill>
                         </a:rPr>
                         <a:t>Other</a:t>
                       </a:r>
-                      <a:endParaRPr lang="en-US" sz="1600" dirty="0"/>
+                      <a:endParaRPr lang="en-US" sz="1700" dirty="0"/>
                     </a:p>
                   </a:txBody>
                   <a:tcPr marL="25400" marR="101600" marT="63500" marB="63500" anchor="ctr">
@@ -18873,14 +18873,14 @@
                         <a:buNone/>
                       </a:pPr>
                       <a:r>
-                        <a:rPr lang="en-US" sz="1600" dirty="0">
+                        <a:rPr lang="en-US" sz="1700" dirty="0">
                           <a:solidFill>
                             <a:schemeClr val="tx1"/>
                           </a:solidFill>
                         </a:rPr>
                         <a:t>12p abnormalities; all NUP98 fusions; CBFA2T3::GLIS2</a:t>
                       </a:r>
-                      <a:endParaRPr lang="en-US" sz="1600" dirty="0"/>
+                      <a:endParaRPr lang="en-US" sz="1700" dirty="0"/>
                     </a:p>
                   </a:txBody>
                   <a:tcPr marL="25400" marR="101600" marT="63500" marB="63500" anchor="ctr">
@@ -18915,14 +18915,14 @@
                         <a:buNone/>
                       </a:pPr>
                       <a:r>
-                        <a:rPr lang="en-US" sz="1600" dirty="0">
+                        <a:rPr lang="en-US" sz="1700" dirty="0">
                           <a:solidFill>
                             <a:schemeClr val="tx1"/>
                           </a:solidFill>
                         </a:rPr>
                         <a:t>FLT3-ITD</a:t>
                       </a:r>
-                      <a:endParaRPr lang="en-US" sz="1600" dirty="0"/>
+                      <a:endParaRPr lang="en-US" sz="1700" dirty="0"/>
                     </a:p>
                   </a:txBody>
                   <a:tcPr marL="25400" marR="101600" marT="63500" marB="63500" anchor="ctr">
@@ -18955,14 +18955,14 @@
                         <a:buNone/>
                       </a:pPr>
                       <a:r>
-                        <a:rPr lang="en-US" sz="1600" dirty="0">
+                        <a:rPr lang="en-US" sz="1700" dirty="0">
                           <a:solidFill>
                             <a:schemeClr val="tx1"/>
                           </a:solidFill>
                         </a:rPr>
                         <a:t>Without NPM1, CEBPA bZIP mutation or CBF-AML</a:t>
                       </a:r>
-                      <a:endParaRPr lang="en-US" sz="1600" dirty="0"/>
+                      <a:endParaRPr lang="en-US" sz="1700" dirty="0"/>
                     </a:p>
                   </a:txBody>
                   <a:tcPr marL="25400" marR="101600" marT="63500" marB="63500" anchor="ctr">
@@ -18997,14 +18997,14 @@
                         <a:buNone/>
                       </a:pPr>
                       <a:r>
-                        <a:rPr lang="en-US" sz="1600" dirty="0">
+                        <a:rPr lang="en-US" sz="1700" dirty="0">
                           <a:solidFill>
                             <a:schemeClr val="tx1"/>
                           </a:solidFill>
                         </a:rPr>
                         <a:t>No consensus</a:t>
                       </a:r>
-                      <a:endParaRPr lang="en-US" sz="1600" dirty="0"/>
+                      <a:endParaRPr lang="en-US" sz="1700" dirty="0"/>
                     </a:p>
                   </a:txBody>
                   <a:tcPr marL="25400" marR="101600" marT="63500" marB="63500" anchor="ctr">
@@ -19037,14 +19037,14 @@
                         <a:buNone/>
                       </a:pPr>
                       <a:r>
-                        <a:rPr lang="en-US" sz="1600" dirty="0">
+                        <a:rPr lang="en-US" sz="1700" dirty="0">
                           <a:solidFill>
                             <a:schemeClr val="tx1"/>
                           </a:solidFill>
                         </a:rPr>
                         <a:t>Complex karyotype</a:t>
                       </a:r>
-                      <a:endParaRPr lang="en-US" sz="1600" dirty="0"/>
+                      <a:endParaRPr lang="en-US" sz="1700" dirty="0"/>
                     </a:p>
                   </a:txBody>
                   <a:tcPr marL="25400" marR="101600" marT="63500" marB="63500" anchor="ctr">
@@ -20190,7 +20190,7 @@
                   <a:schemeClr val="tx1"/>
                 </a:solidFill>
               </a:rPr>
-              <a:t>Targeted drugs need QTc, differentiation-syndrome and cytopenia monitoring. Most failures come from relapse in CR1, not induction failure or TRM.</a:t>
+              <a:t>Most treatment failures are relapses from CR1, not induction failure or TRM.</a:t>
             </a:r>
             <a:endParaRPr lang="en-US" sz="1600" dirty="0"/>
           </a:p>
@@ -20416,14 +20416,14 @@
                         <a:buNone/>
                       </a:pPr>
                       <a:r>
-                        <a:rPr lang="en-US" sz="1500" b="1" dirty="0">
+                        <a:rPr lang="en-US" sz="1600" b="1" dirty="0">
                           <a:solidFill>
                             <a:schemeClr val="tx1"/>
                           </a:solidFill>
                         </a:rPr>
                         <a:t>ELN 2022</a:t>
                       </a:r>
-                      <a:endParaRPr lang="en-US" sz="1500" dirty="0"/>
+                      <a:endParaRPr lang="en-US" sz="1600" dirty="0"/>
                     </a:p>
                   </a:txBody>
                   <a:tcPr marL="25400" marR="101600" marT="63500" marB="63500" anchor="ctr">
@@ -20462,14 +20462,14 @@
                         <a:buNone/>
                       </a:pPr>
                       <a:r>
-                        <a:rPr lang="en-US" sz="1500" b="1" dirty="0">
+                        <a:rPr lang="en-US" sz="1600" b="1" dirty="0">
                           <a:solidFill>
                             <a:schemeClr val="tx1"/>
                           </a:solidFill>
                         </a:rPr>
                         <a:t>Genetic lesions (Table 70.1)</a:t>
                       </a:r>
-                      <a:endParaRPr lang="en-US" sz="1500" dirty="0"/>
+                      <a:endParaRPr lang="en-US" sz="1600" dirty="0"/>
                     </a:p>
                   </a:txBody>
                   <a:tcPr marL="25400" marR="101600" marT="63500" marB="63500" anchor="ctr">
@@ -20510,14 +20510,14 @@
                         <a:buNone/>
                       </a:pPr>
                       <a:r>
-                        <a:rPr lang="en-US" sz="1500" dirty="0">
+                        <a:rPr lang="en-US" sz="1600" dirty="0">
                           <a:solidFill>
                             <a:schemeClr val="tx1"/>
                           </a:solidFill>
                         </a:rPr>
                         <a:t>Favorable</a:t>
                       </a:r>
-                      <a:endParaRPr lang="en-US" sz="1500" dirty="0"/>
+                      <a:endParaRPr lang="en-US" sz="1600" dirty="0"/>
                     </a:p>
                   </a:txBody>
                   <a:tcPr marL="25400" marR="101600" marT="63500" marB="63500" anchor="ctr">
@@ -20550,14 +20550,14 @@
                         <a:buNone/>
                       </a:pPr>
                       <a:r>
-                        <a:rPr lang="en-US" sz="1500" dirty="0">
+                        <a:rPr lang="en-US" sz="1600" dirty="0">
                           <a:solidFill>
                             <a:schemeClr val="tx1"/>
                           </a:solidFill>
                         </a:rPr>
                         <a:t>t(8;21) RUNX1::RUNX1T1; inv(16) or t(16;16) CBFB::MYH11</a:t>
                       </a:r>
-                      <a:endParaRPr lang="en-US" sz="1500" dirty="0"/>
+                      <a:endParaRPr lang="en-US" sz="1600" dirty="0"/>
                     </a:p>
                   </a:txBody>
                   <a:tcPr marL="25400" marR="101600" marT="63500" marB="63500" anchor="ctr">
@@ -20592,14 +20592,14 @@
                         <a:buNone/>
                       </a:pPr>
                       <a:r>
-                        <a:rPr lang="en-US" sz="1500" dirty="0">
+                        <a:rPr lang="en-US" sz="1600" dirty="0">
                           <a:solidFill>
                             <a:schemeClr val="tx1"/>
                           </a:solidFill>
                         </a:rPr>
                         <a:t>Favorable</a:t>
                       </a:r>
-                      <a:endParaRPr lang="en-US" sz="1500" dirty="0"/>
+                      <a:endParaRPr lang="en-US" sz="1600" dirty="0"/>
                     </a:p>
                   </a:txBody>
                   <a:tcPr marL="25400" marR="101600" marT="63500" marB="63500" anchor="ctr">
@@ -20632,14 +20632,14 @@
                         <a:buNone/>
                       </a:pPr>
                       <a:r>
-                        <a:rPr lang="en-US" sz="1500" dirty="0">
+                        <a:rPr lang="en-US" sz="1600" dirty="0">
                           <a:solidFill>
                             <a:schemeClr val="tx1"/>
                           </a:solidFill>
                         </a:rPr>
                         <a:t>Mutated NPM1 without FLT3-ITD; bZIP in-frame mutated CEBPA</a:t>
                       </a:r>
-                      <a:endParaRPr lang="en-US" sz="1500" dirty="0"/>
+                      <a:endParaRPr lang="en-US" sz="1600" dirty="0"/>
                     </a:p>
                   </a:txBody>
                   <a:tcPr marL="25400" marR="101600" marT="63500" marB="63500" anchor="ctr">
@@ -20674,14 +20674,14 @@
                         <a:buNone/>
                       </a:pPr>
                       <a:r>
-                        <a:rPr lang="en-US" sz="1500" dirty="0">
+                        <a:rPr lang="en-US" sz="1600" dirty="0">
                           <a:solidFill>
                             <a:schemeClr val="tx1"/>
                           </a:solidFill>
                         </a:rPr>
                         <a:t>Intermediate</a:t>
                       </a:r>
-                      <a:endParaRPr lang="en-US" sz="1500" dirty="0"/>
+                      <a:endParaRPr lang="en-US" sz="1600" dirty="0"/>
                     </a:p>
                   </a:txBody>
                   <a:tcPr marL="25400" marR="101600" marT="63500" marB="63500" anchor="ctr">
@@ -20714,14 +20714,14 @@
                         <a:buNone/>
                       </a:pPr>
                       <a:r>
-                        <a:rPr lang="en-US" sz="1500" dirty="0">
+                        <a:rPr lang="en-US" sz="1600" dirty="0">
                           <a:solidFill>
                             <a:schemeClr val="tx1"/>
                           </a:solidFill>
                         </a:rPr>
                         <a:t>Mutated NPM1 with FLT3-ITD; wild-type NPM1 without FLT3-ITD</a:t>
                       </a:r>
-                      <a:endParaRPr lang="en-US" sz="1500" dirty="0"/>
+                      <a:endParaRPr lang="en-US" sz="1600" dirty="0"/>
                     </a:p>
                   </a:txBody>
                   <a:tcPr marL="25400" marR="101600" marT="63500" marB="63500" anchor="ctr">
@@ -20756,14 +20756,14 @@
                         <a:buNone/>
                       </a:pPr>
                       <a:r>
-                        <a:rPr lang="en-US" sz="1500" dirty="0">
+                        <a:rPr lang="en-US" sz="1600" dirty="0">
                           <a:solidFill>
                             <a:schemeClr val="tx1"/>
                           </a:solidFill>
                         </a:rPr>
                         <a:t>Intermediate</a:t>
                       </a:r>
-                      <a:endParaRPr lang="en-US" sz="1500" dirty="0"/>
+                      <a:endParaRPr lang="en-US" sz="1600" dirty="0"/>
                     </a:p>
                   </a:txBody>
                   <a:tcPr marL="25400" marR="101600" marT="63500" marB="63500" anchor="ctr">
@@ -20796,14 +20796,14 @@
                         <a:buNone/>
                       </a:pPr>
                       <a:r>
-                        <a:rPr lang="en-US" sz="1500" dirty="0">
+                        <a:rPr lang="en-US" sz="1600" dirty="0">
                           <a:solidFill>
                             <a:schemeClr val="tx1"/>
                           </a:solidFill>
                         </a:rPr>
                         <a:t>t(9;11) MLLT3::KMT2A; lesions neither favorable nor adverse</a:t>
                       </a:r>
-                      <a:endParaRPr lang="en-US" sz="1500" dirty="0"/>
+                      <a:endParaRPr lang="en-US" sz="1600" dirty="0"/>
                     </a:p>
                   </a:txBody>
                   <a:tcPr marL="25400" marR="101600" marT="63500" marB="63500" anchor="ctr">
@@ -20838,14 +20838,14 @@
                         <a:buNone/>
                       </a:pPr>
                       <a:r>
-                        <a:rPr lang="en-US" sz="1500" dirty="0">
+                        <a:rPr lang="en-US" sz="1600" dirty="0">
                           <a:solidFill>
                             <a:schemeClr val="tx1"/>
                           </a:solidFill>
                         </a:rPr>
                         <a:t>Adverse</a:t>
                       </a:r>
-                      <a:endParaRPr lang="en-US" sz="1500" dirty="0"/>
+                      <a:endParaRPr lang="en-US" sz="1600" dirty="0"/>
                     </a:p>
                   </a:txBody>
                   <a:tcPr marL="25400" marR="101600" marT="63500" marB="63500" anchor="ctr">
@@ -20878,14 +20878,14 @@
                         <a:buNone/>
                       </a:pPr>
                       <a:r>
-                        <a:rPr lang="en-US" sz="1500" dirty="0">
+                        <a:rPr lang="en-US" sz="1600" dirty="0">
                           <a:solidFill>
                             <a:schemeClr val="tx1"/>
                           </a:solidFill>
                         </a:rPr>
                         <a:t>t(6;9) DEK::NUP214; KMT2A-r; t(9;22) BCR::ABL1; t(8;16)</a:t>
                       </a:r>
-                      <a:endParaRPr lang="en-US" sz="1500" dirty="0"/>
+                      <a:endParaRPr lang="en-US" sz="1600" dirty="0"/>
                     </a:p>
                   </a:txBody>
                   <a:tcPr marL="25400" marR="101600" marT="63500" marB="63500" anchor="ctr">
@@ -20920,14 +20920,14 @@
                         <a:buNone/>
                       </a:pPr>
                       <a:r>
-                        <a:rPr lang="en-US" sz="1500" dirty="0">
+                        <a:rPr lang="en-US" sz="1600" dirty="0">
                           <a:solidFill>
                             <a:schemeClr val="tx1"/>
                           </a:solidFill>
                         </a:rPr>
                         <a:t>Adverse</a:t>
                       </a:r>
-                      <a:endParaRPr lang="en-US" sz="1500" dirty="0"/>
+                      <a:endParaRPr lang="en-US" sz="1600" dirty="0"/>
                     </a:p>
                   </a:txBody>
                   <a:tcPr marL="25400" marR="101600" marT="63500" marB="63500" anchor="ctr">
@@ -20960,14 +20960,14 @@
                         <a:buNone/>
                       </a:pPr>
                       <a:r>
-                        <a:rPr lang="en-US" sz="1500" dirty="0">
+                        <a:rPr lang="en-US" sz="1600" dirty="0">
                           <a:solidFill>
                             <a:schemeClr val="tx1"/>
                           </a:solidFill>
                         </a:rPr>
                         <a:t>inv(3)/t(3;3) or 3q26 MECOM-r; −5/del(5q); −7; −17/abn(17p)</a:t>
                       </a:r>
-                      <a:endParaRPr lang="en-US" sz="1500" dirty="0"/>
+                      <a:endParaRPr lang="en-US" sz="1600" dirty="0"/>
                     </a:p>
                   </a:txBody>
                   <a:tcPr marL="25400" marR="101600" marT="63500" marB="63500" anchor="ctr">
@@ -21002,14 +21002,14 @@
                         <a:buNone/>
                       </a:pPr>
                       <a:r>
-                        <a:rPr lang="en-US" sz="1500" dirty="0">
+                        <a:rPr lang="en-US" sz="1600" dirty="0">
                           <a:solidFill>
                             <a:schemeClr val="tx1"/>
                           </a:solidFill>
                         </a:rPr>
                         <a:t>Adverse</a:t>
                       </a:r>
-                      <a:endParaRPr lang="en-US" sz="1500" dirty="0"/>
+                      <a:endParaRPr lang="en-US" sz="1600" dirty="0"/>
                     </a:p>
                   </a:txBody>
                   <a:tcPr marL="25400" marR="101600" marT="63500" marB="63500" anchor="ctr">
@@ -21042,14 +21042,14 @@
                         <a:buNone/>
                       </a:pPr>
                       <a:r>
-                        <a:rPr lang="en-US" sz="1500" dirty="0">
+                        <a:rPr lang="en-US" sz="1600" dirty="0">
                           <a:solidFill>
                             <a:schemeClr val="tx1"/>
                           </a:solidFill>
                         </a:rPr>
                         <a:t>Complex (not hyperdiploid) or monosomal; TP53 VAF ≥ 10%</a:t>
                       </a:r>
-                      <a:endParaRPr lang="en-US" sz="1500" dirty="0"/>
+                      <a:endParaRPr lang="en-US" sz="1600" dirty="0"/>
                     </a:p>
                   </a:txBody>
                   <a:tcPr marL="25400" marR="101600" marT="63500" marB="63500" anchor="ctr">
@@ -21084,14 +21084,14 @@
                         <a:buNone/>
                       </a:pPr>
                       <a:r>
-                        <a:rPr lang="en-US" sz="1500" dirty="0">
+                        <a:rPr lang="en-US" sz="1600" dirty="0">
                           <a:solidFill>
                             <a:schemeClr val="tx1"/>
                           </a:solidFill>
                         </a:rPr>
                         <a:t>Adverse</a:t>
                       </a:r>
-                      <a:endParaRPr lang="en-US" sz="1500" dirty="0"/>
+                      <a:endParaRPr lang="en-US" sz="1600" dirty="0"/>
                     </a:p>
                   </a:txBody>
                   <a:tcPr marL="25400" marR="101600" marT="63500" marB="63500" anchor="ctr">
@@ -21124,14 +21124,14 @@
                         <a:buNone/>
                       </a:pPr>
                       <a:r>
-                        <a:rPr lang="en-US" sz="1500" dirty="0">
+                        <a:rPr lang="en-US" sz="1600" dirty="0">
                           <a:solidFill>
                             <a:schemeClr val="tx1"/>
                           </a:solidFill>
                         </a:rPr>
                         <a:t>ASXL1, BCOR, EZH2, RUNX1, SF3B1, SRSF2, STAG2, U2AF1, ZRSR2</a:t>
                       </a:r>
-                      <a:endParaRPr lang="en-US" sz="1500" dirty="0"/>
+                      <a:endParaRPr lang="en-US" sz="1600" dirty="0"/>
                     </a:p>
                   </a:txBody>
                   <a:tcPr marL="25400" marR="101600" marT="63500" marB="63500" anchor="ctr">
@@ -21416,14 +21416,14 @@
                         <a:buNone/>
                       </a:pPr>
                       <a:r>
-                        <a:rPr lang="en-US" sz="1600" b="1" dirty="0">
+                        <a:rPr lang="en-US" sz="1700" b="1" dirty="0">
                           <a:solidFill>
                             <a:schemeClr val="tx1"/>
                           </a:solidFill>
                         </a:rPr>
                         <a:t>ELN 2022 change</a:t>
                       </a:r>
-                      <a:endParaRPr lang="en-US" sz="1600" dirty="0"/>
+                      <a:endParaRPr lang="en-US" sz="1700" dirty="0"/>
                     </a:p>
                   </a:txBody>
                   <a:tcPr marL="25400" marR="101600" marT="63500" marB="63500" anchor="ctr">
@@ -21462,14 +21462,14 @@
                         <a:buNone/>
                       </a:pPr>
                       <a:r>
-                        <a:rPr lang="en-US" sz="1600" b="1" dirty="0">
+                        <a:rPr lang="en-US" sz="1700" b="1" dirty="0">
                           <a:solidFill>
                             <a:schemeClr val="tx1"/>
                           </a:solidFill>
                         </a:rPr>
                         <a:t>What it means for risk</a:t>
                       </a:r>
-                      <a:endParaRPr lang="en-US" sz="1600" dirty="0"/>
+                      <a:endParaRPr lang="en-US" sz="1700" dirty="0"/>
                     </a:p>
                   </a:txBody>
                   <a:tcPr marL="25400" marR="101600" marT="63500" marB="63500" anchor="ctr">
@@ -21510,14 +21510,14 @@
                         <a:buNone/>
                       </a:pPr>
                       <a:r>
-                        <a:rPr lang="en-US" sz="1600" dirty="0">
+                        <a:rPr lang="en-US" sz="1700" dirty="0">
                           <a:solidFill>
                             <a:schemeClr val="tx1"/>
                           </a:solidFill>
                         </a:rPr>
                         <a:t>MDS-related mutations added</a:t>
                       </a:r>
-                      <a:endParaRPr lang="en-US" sz="1600" dirty="0"/>
+                      <a:endParaRPr lang="en-US" sz="1700" dirty="0"/>
                     </a:p>
                   </a:txBody>
                   <a:tcPr marL="25400" marR="101600" marT="63500" marB="63500" anchor="ctr">
@@ -21550,14 +21550,14 @@
                         <a:buNone/>
                       </a:pPr>
                       <a:r>
-                        <a:rPr lang="en-US" sz="1600" dirty="0">
+                        <a:rPr lang="en-US" sz="1700" dirty="0">
                           <a:solidFill>
                             <a:schemeClr val="tx1"/>
                           </a:solidFill>
                         </a:rPr>
                         <a:t>BCOR, EZH2, SF3B1, SRSF2, STAG2, U2AF1, ZRSR2 → adverse</a:t>
                       </a:r>
-                      <a:endParaRPr lang="en-US" sz="1600" dirty="0"/>
+                      <a:endParaRPr lang="en-US" sz="1700" dirty="0"/>
                     </a:p>
                   </a:txBody>
                   <a:tcPr marL="25400" marR="101600" marT="63500" marB="63500" anchor="ctr">
@@ -21592,14 +21592,14 @@
                         <a:buNone/>
                       </a:pPr>
                       <a:r>
-                        <a:rPr lang="en-US" sz="1600" dirty="0">
+                        <a:rPr lang="en-US" sz="1700" dirty="0">
                           <a:solidFill>
                             <a:schemeClr val="tx1"/>
                           </a:solidFill>
                         </a:rPr>
                         <a:t>FLT3-ITD allelic ratio</a:t>
                       </a:r>
-                      <a:endParaRPr lang="en-US" sz="1600" dirty="0"/>
+                      <a:endParaRPr lang="en-US" sz="1700" dirty="0"/>
                     </a:p>
                   </a:txBody>
                   <a:tcPr marL="25400" marR="101600" marT="63500" marB="63500" anchor="ctr">
@@ -21632,14 +21632,14 @@
                         <a:buNone/>
                       </a:pPr>
                       <a:r>
-                        <a:rPr lang="en-US" sz="1600" dirty="0">
+                        <a:rPr lang="en-US" sz="1700" dirty="0">
                           <a:solidFill>
                             <a:schemeClr val="tx1"/>
                           </a:solidFill>
                         </a:rPr>
                         <a:t>No longer used in the classification</a:t>
                       </a:r>
-                      <a:endParaRPr lang="en-US" sz="1600" dirty="0"/>
+                      <a:endParaRPr lang="en-US" sz="1700" dirty="0"/>
                     </a:p>
                   </a:txBody>
                   <a:tcPr marL="25400" marR="101600" marT="63500" marB="63500" anchor="ctr">
@@ -21674,14 +21674,14 @@
                         <a:buNone/>
                       </a:pPr>
                       <a:r>
-                        <a:rPr lang="en-US" sz="1600" dirty="0">
+                        <a:rPr lang="en-US" sz="1700" dirty="0">
                           <a:solidFill>
                             <a:schemeClr val="tx1"/>
                           </a:solidFill>
                         </a:rPr>
                         <a:t>CEBPA</a:t>
                       </a:r>
-                      <a:endParaRPr lang="en-US" sz="1600" dirty="0"/>
+                      <a:endParaRPr lang="en-US" sz="1700" dirty="0"/>
                     </a:p>
                   </a:txBody>
                   <a:tcPr marL="25400" marR="101600" marT="63500" marB="63500" anchor="ctr">
@@ -21714,14 +21714,14 @@
                         <a:buNone/>
                       </a:pPr>
                       <a:r>
-                        <a:rPr lang="en-US" sz="1600" dirty="0">
+                        <a:rPr lang="en-US" sz="1700" dirty="0">
                           <a:solidFill>
                             <a:schemeClr val="tx1"/>
                           </a:solidFill>
                         </a:rPr>
                         <a:t>Only in-frame bZIP mutations favorable, mono- or bi-allelic</a:t>
                       </a:r>
-                      <a:endParaRPr lang="en-US" sz="1600" dirty="0"/>
+                      <a:endParaRPr lang="en-US" sz="1700" dirty="0"/>
                     </a:p>
                   </a:txBody>
                   <a:tcPr marL="25400" marR="101600" marT="63500" marB="63500" anchor="ctr">
@@ -21756,14 +21756,14 @@
                         <a:buNone/>
                       </a:pPr>
                       <a:r>
-                        <a:rPr lang="en-US" sz="1600" dirty="0">
+                        <a:rPr lang="en-US" sz="1700" dirty="0">
                           <a:solidFill>
                             <a:schemeClr val="tx1"/>
                           </a:solidFill>
                         </a:rPr>
                         <a:t>NPM1</a:t>
                       </a:r>
-                      <a:endParaRPr lang="en-US" sz="1600" dirty="0"/>
+                      <a:endParaRPr lang="en-US" sz="1700" dirty="0"/>
                     </a:p>
                   </a:txBody>
                   <a:tcPr marL="25400" marR="101600" marT="63500" marB="63500" anchor="ctr">
@@ -21796,14 +21796,14 @@
                         <a:buNone/>
                       </a:pPr>
                       <a:r>
-                        <a:rPr lang="en-US" sz="1600" dirty="0">
+                        <a:rPr lang="en-US" sz="1700" dirty="0">
                           <a:solidFill>
                             <a:schemeClr val="tx1"/>
                           </a:solidFill>
                         </a:rPr>
                         <a:t>Not favorable when adverse-risk cytogenetics are present</a:t>
                       </a:r>
-                      <a:endParaRPr lang="en-US" sz="1600" dirty="0"/>
+                      <a:endParaRPr lang="en-US" sz="1700" dirty="0"/>
                     </a:p>
                   </a:txBody>
                   <a:tcPr marL="25400" marR="101600" marT="63500" marB="63500" anchor="ctr">
@@ -21838,14 +21838,14 @@
                         <a:buNone/>
                       </a:pPr>
                       <a:r>
-                        <a:rPr lang="en-US" sz="1600" dirty="0">
+                        <a:rPr lang="en-US" sz="1700" dirty="0">
                           <a:solidFill>
                             <a:schemeClr val="tx1"/>
                           </a:solidFill>
                         </a:rPr>
                         <a:t>New adverse rearrangements</a:t>
                       </a:r>
-                      <a:endParaRPr lang="en-US" sz="1600" dirty="0"/>
+                      <a:endParaRPr lang="en-US" sz="1700" dirty="0"/>
                     </a:p>
                   </a:txBody>
                   <a:tcPr marL="25400" marR="101600" marT="63500" marB="63500" anchor="ctr">
@@ -21878,14 +21878,14 @@
                         <a:buNone/>
                       </a:pPr>
                       <a:r>
-                        <a:rPr lang="en-US" sz="1600" dirty="0">
+                        <a:rPr lang="en-US" sz="1700" dirty="0">
                           <a:solidFill>
                             <a:schemeClr val="tx1"/>
                           </a:solidFill>
                         </a:rPr>
                         <a:t>t(3q26.2;v)/MECOM and t(8;16)/KAT6A::CREBBP</a:t>
                       </a:r>
-                      <a:endParaRPr lang="en-US" sz="1600" dirty="0"/>
+                      <a:endParaRPr lang="en-US" sz="1700" dirty="0"/>
                     </a:p>
                   </a:txBody>
                   <a:tcPr marL="25400" marR="101600" marT="63500" marB="63500" anchor="ctr">
@@ -21920,14 +21920,14 @@
                         <a:buNone/>
                       </a:pPr>
                       <a:r>
-                        <a:rPr lang="en-US" sz="1600" dirty="0">
+                        <a:rPr lang="en-US" sz="1700" dirty="0">
                           <a:solidFill>
                             <a:schemeClr val="tx1"/>
                           </a:solidFill>
                         </a:rPr>
                         <a:t>Hyperdiploid karyotype</a:t>
                       </a:r>
-                      <a:endParaRPr lang="en-US" sz="1600" dirty="0"/>
+                      <a:endParaRPr lang="en-US" sz="1700" dirty="0"/>
                     </a:p>
                   </a:txBody>
                   <a:tcPr marL="25400" marR="101600" marT="63500" marB="63500" anchor="ctr">
@@ -21960,14 +21960,14 @@
                         <a:buNone/>
                       </a:pPr>
                       <a:r>
-                        <a:rPr lang="en-US" sz="1600" dirty="0">
+                        <a:rPr lang="en-US" sz="1700" dirty="0">
                           <a:solidFill>
                             <a:schemeClr val="tx1"/>
                           </a:solidFill>
                         </a:rPr>
                         <a:t>No longer counted as complex karyotype</a:t>
                       </a:r>
-                      <a:endParaRPr lang="en-US" sz="1600" dirty="0"/>
+                      <a:endParaRPr lang="en-US" sz="1700" dirty="0"/>
                     </a:p>
                   </a:txBody>
                   <a:tcPr marL="25400" marR="101600" marT="63500" marB="63500" anchor="ctr">
@@ -22002,14 +22002,14 @@
                         <a:buNone/>
                       </a:pPr>
                       <a:r>
-                        <a:rPr lang="en-US" sz="1600" dirty="0">
+                        <a:rPr lang="en-US" sz="1700" dirty="0">
                           <a:solidFill>
                             <a:schemeClr val="tx1"/>
                           </a:solidFill>
                         </a:rPr>
                         <a:t>TP53</a:t>
                       </a:r>
-                      <a:endParaRPr lang="en-US" sz="1600" dirty="0"/>
+                      <a:endParaRPr lang="en-US" sz="1700" dirty="0"/>
                     </a:p>
                   </a:txBody>
                   <a:tcPr marL="25400" marR="101600" marT="63500" marB="63500" anchor="ctr">
@@ -22042,14 +22042,14 @@
                         <a:buNone/>
                       </a:pPr>
                       <a:r>
-                        <a:rPr lang="en-US" sz="1600" dirty="0">
+                        <a:rPr lang="en-US" sz="1700" dirty="0">
                           <a:solidFill>
                             <a:schemeClr val="tx1"/>
                           </a:solidFill>
                         </a:rPr>
                         <a:t>Adverse only at variant allele fraction ≥ 10%</a:t>
                       </a:r>
-                      <a:endParaRPr lang="en-US" sz="1600" dirty="0"/>
+                      <a:endParaRPr lang="en-US" sz="1700" dirty="0"/>
                     </a:p>
                   </a:txBody>
                   <a:tcPr marL="25400" marR="101600" marT="63500" marB="63500" anchor="ctr">
@@ -22334,7 +22334,7 @@
                       <a:pPr indent="0" marL="0">
                         <a:buNone/>
                       </a:pPr>
-                      <a:endParaRPr lang="en-US" sz="1600" dirty="0"/>
+                      <a:endParaRPr lang="en-US" sz="1700" dirty="0"/>
                     </a:p>
                   </a:txBody>
                   <a:tcPr marL="25400" marR="101600" marT="63500" marB="63500" anchor="ctr">
@@ -22373,14 +22373,14 @@
                         <a:buNone/>
                       </a:pPr>
                       <a:r>
-                        <a:rPr lang="en-US" sz="1600" b="1" dirty="0">
+                        <a:rPr lang="en-US" sz="1700" b="1" dirty="0">
                           <a:solidFill>
                             <a:schemeClr val="tx1"/>
                           </a:solidFill>
                         </a:rPr>
                         <a:t>Multiparametric flow (MFC)</a:t>
                       </a:r>
-                      <a:endParaRPr lang="en-US" sz="1600" dirty="0"/>
+                      <a:endParaRPr lang="en-US" sz="1700" dirty="0"/>
                     </a:p>
                   </a:txBody>
                   <a:tcPr marL="25400" marR="101600" marT="63500" marB="63500" anchor="ctr">
@@ -22419,14 +22419,14 @@
                         <a:buNone/>
                       </a:pPr>
                       <a:r>
-                        <a:rPr lang="en-US" sz="1600" b="1" dirty="0">
+                        <a:rPr lang="en-US" sz="1700" b="1" dirty="0">
                           <a:solidFill>
                             <a:schemeClr val="tx1"/>
                           </a:solidFill>
                         </a:rPr>
                         <a:t>RT-qPCR</a:t>
                       </a:r>
-                      <a:endParaRPr lang="en-US" sz="1600" dirty="0"/>
+                      <a:endParaRPr lang="en-US" sz="1700" dirty="0"/>
                     </a:p>
                   </a:txBody>
                   <a:tcPr marL="25400" marR="101600" marT="63500" marB="63500" anchor="ctr">
@@ -22467,14 +22467,14 @@
                         <a:buNone/>
                       </a:pPr>
                       <a:r>
-                        <a:rPr lang="en-US" sz="1600" dirty="0">
+                        <a:rPr lang="en-US" sz="1700" dirty="0">
                           <a:solidFill>
                             <a:schemeClr val="tx1"/>
                           </a:solidFill>
                         </a:rPr>
                         <a:t>Target</a:t>
                       </a:r>
-                      <a:endParaRPr lang="en-US" sz="1600" dirty="0"/>
+                      <a:endParaRPr lang="en-US" sz="1700" dirty="0"/>
                     </a:p>
                   </a:txBody>
                   <a:tcPr marL="25400" marR="101600" marT="63500" marB="63500" anchor="ctr">
@@ -22507,14 +22507,14 @@
                         <a:buNone/>
                       </a:pPr>
                       <a:r>
-                        <a:rPr lang="en-US" sz="1600" dirty="0">
+                        <a:rPr lang="en-US" sz="1700" dirty="0">
                           <a:solidFill>
                             <a:schemeClr val="tx1"/>
                           </a:solidFill>
                         </a:rPr>
                         <a:t>Leukaemia-aberrant or different-from-normal phenotype</a:t>
                       </a:r>
-                      <a:endParaRPr lang="en-US" sz="1600" dirty="0"/>
+                      <a:endParaRPr lang="en-US" sz="1700" dirty="0"/>
                     </a:p>
                   </a:txBody>
                   <a:tcPr marL="25400" marR="101600" marT="63500" marB="63500" anchor="ctr">
@@ -22547,14 +22547,14 @@
                         <a:buNone/>
                       </a:pPr>
                       <a:r>
-                        <a:rPr lang="en-US" sz="1600" dirty="0">
+                        <a:rPr lang="en-US" sz="1700" dirty="0">
                           <a:solidFill>
                             <a:schemeClr val="tx1"/>
                           </a:solidFill>
                         </a:rPr>
                         <a:t>Fusion gene or NPM1 mutation</a:t>
                       </a:r>
-                      <a:endParaRPr lang="en-US" sz="1600" dirty="0"/>
+                      <a:endParaRPr lang="en-US" sz="1700" dirty="0"/>
                     </a:p>
                   </a:txBody>
                   <a:tcPr marL="25400" marR="101600" marT="63500" marB="63500" anchor="ctr">
@@ -22589,14 +22589,14 @@
                         <a:buNone/>
                       </a:pPr>
                       <a:r>
-                        <a:rPr lang="en-US" sz="1600" dirty="0">
+                        <a:rPr lang="en-US" sz="1700" dirty="0">
                           <a:solidFill>
                             <a:schemeClr val="tx1"/>
                           </a:solidFill>
                         </a:rPr>
                         <a:t>Sensitivity</a:t>
                       </a:r>
-                      <a:endParaRPr lang="en-US" sz="1600" dirty="0"/>
+                      <a:endParaRPr lang="en-US" sz="1700" dirty="0"/>
                     </a:p>
                   </a:txBody>
                   <a:tcPr marL="25400" marR="101600" marT="63500" marB="63500" anchor="ctr">
@@ -22629,14 +22629,14 @@
                         <a:buNone/>
                       </a:pPr>
                       <a:r>
-                        <a:rPr lang="en-US" sz="1600" dirty="0">
+                        <a:rPr lang="en-US" sz="1700" dirty="0">
                           <a:solidFill>
                             <a:schemeClr val="tx1"/>
                           </a:solidFill>
                         </a:rPr>
                         <a:t>0.1–0.01%</a:t>
                       </a:r>
-                      <a:endParaRPr lang="en-US" sz="1600" dirty="0"/>
+                      <a:endParaRPr lang="en-US" sz="1700" dirty="0"/>
                     </a:p>
                   </a:txBody>
                   <a:tcPr marL="25400" marR="101600" marT="63500" marB="63500" anchor="ctr">
@@ -22669,14 +22669,14 @@
                         <a:buNone/>
                       </a:pPr>
                       <a:r>
-                        <a:rPr lang="en-US" sz="1600" dirty="0">
+                        <a:rPr lang="en-US" sz="1700" dirty="0">
                           <a:solidFill>
                             <a:schemeClr val="tx1"/>
                           </a:solidFill>
                         </a:rPr>
                         <a:t>0.1–0.001%</a:t>
                       </a:r>
-                      <a:endParaRPr lang="en-US" sz="1600" dirty="0"/>
+                      <a:endParaRPr lang="en-US" sz="1700" dirty="0"/>
                     </a:p>
                   </a:txBody>
                   <a:tcPr marL="25400" marR="101600" marT="63500" marB="63500" anchor="ctr">
@@ -22711,14 +22711,14 @@
                         <a:buNone/>
                       </a:pPr>
                       <a:r>
-                        <a:rPr lang="en-US" sz="1600" dirty="0">
+                        <a:rPr lang="en-US" sz="1700" dirty="0">
                           <a:solidFill>
                             <a:schemeClr val="tx1"/>
                           </a:solidFill>
                         </a:rPr>
                         <a:t>Applicable</a:t>
                       </a:r>
-                      <a:endParaRPr lang="en-US" sz="1600" dirty="0"/>
+                      <a:endParaRPr lang="en-US" sz="1700" dirty="0"/>
                     </a:p>
                   </a:txBody>
                   <a:tcPr marL="25400" marR="101600" marT="63500" marB="63500" anchor="ctr">
@@ -22751,14 +22751,14 @@
                         <a:buNone/>
                       </a:pPr>
                       <a:r>
-                        <a:rPr lang="en-US" sz="1600" dirty="0">
+                        <a:rPr lang="en-US" sz="1700" dirty="0">
                           <a:solidFill>
                             <a:schemeClr val="tx1"/>
                           </a:solidFill>
                         </a:rPr>
                         <a:t>About 90% with an appropriate panel</a:t>
                       </a:r>
-                      <a:endParaRPr lang="en-US" sz="1600" dirty="0"/>
+                      <a:endParaRPr lang="en-US" sz="1700" dirty="0"/>
                     </a:p>
                   </a:txBody>
                   <a:tcPr marL="25400" marR="101600" marT="63500" marB="63500" anchor="ctr">
@@ -22791,14 +22791,14 @@
                         <a:buNone/>
                       </a:pPr>
                       <a:r>
-                        <a:rPr lang="en-US" sz="1600" dirty="0">
+                        <a:rPr lang="en-US" sz="1700" dirty="0">
                           <a:solidFill>
                             <a:schemeClr val="tx1"/>
                           </a:solidFill>
                         </a:rPr>
                         <a:t>About 80% (those with a target)</a:t>
                       </a:r>
-                      <a:endParaRPr lang="en-US" sz="1600" dirty="0"/>
+                      <a:endParaRPr lang="en-US" sz="1700" dirty="0"/>
                     </a:p>
                   </a:txBody>
                   <a:tcPr marL="25400" marR="101600" marT="63500" marB="63500" anchor="ctr">
@@ -22833,14 +22833,14 @@
                         <a:buNone/>
                       </a:pPr>
                       <a:r>
-                        <a:rPr lang="en-US" sz="1600" dirty="0">
+                        <a:rPr lang="en-US" sz="1700" dirty="0">
                           <a:solidFill>
                             <a:schemeClr val="tx1"/>
                           </a:solidFill>
                         </a:rPr>
                         <a:t>Usual cut-off</a:t>
                       </a:r>
-                      <a:endParaRPr lang="en-US" sz="1600" dirty="0"/>
+                      <a:endParaRPr lang="en-US" sz="1700" dirty="0"/>
                     </a:p>
                   </a:txBody>
                   <a:tcPr marL="25400" marR="101600" marT="63500" marB="63500" anchor="ctr">
@@ -22873,14 +22873,14 @@
                         <a:buNone/>
                       </a:pPr>
                       <a:r>
-                        <a:rPr lang="en-US" sz="1600" dirty="0">
+                        <a:rPr lang="en-US" sz="1700" dirty="0">
                           <a:solidFill>
                             <a:schemeClr val="tx1"/>
                           </a:solidFill>
                         </a:rPr>
                         <a:t>0.1% after course 1 or 2</a:t>
                       </a:r>
-                      <a:endParaRPr lang="en-US" sz="1600" dirty="0"/>
+                      <a:endParaRPr lang="en-US" sz="1700" dirty="0"/>
                     </a:p>
                   </a:txBody>
                   <a:tcPr marL="25400" marR="101600" marT="63500" marB="63500" anchor="ctr">
@@ -22913,14 +22913,14 @@
                         <a:buNone/>
                       </a:pPr>
                       <a:r>
-                        <a:rPr lang="en-US" sz="1600" dirty="0">
+                        <a:rPr lang="en-US" sz="1700" dirty="0">
                           <a:solidFill>
                             <a:schemeClr val="tx1"/>
                           </a:solidFill>
                         </a:rPr>
                         <a:t>Serially rising transcripts = MRD relapse</a:t>
                       </a:r>
-                      <a:endParaRPr lang="en-US" sz="1600" dirty="0"/>
+                      <a:endParaRPr lang="en-US" sz="1700" dirty="0"/>
                     </a:p>
                   </a:txBody>
                   <a:tcPr marL="25400" marR="101600" marT="63500" marB="63500" anchor="ctr">
@@ -22955,14 +22955,14 @@
                         <a:buNone/>
                       </a:pPr>
                       <a:r>
-                        <a:rPr lang="en-US" sz="1600" dirty="0">
+                        <a:rPr lang="en-US" sz="1700" dirty="0">
                           <a:solidFill>
                             <a:schemeClr val="tx1"/>
                           </a:solidFill>
                         </a:rPr>
                         <a:t>Main use</a:t>
                       </a:r>
-                      <a:endParaRPr lang="en-US" sz="1600" dirty="0"/>
+                      <a:endParaRPr lang="en-US" sz="1700" dirty="0"/>
                     </a:p>
                   </a:txBody>
                   <a:tcPr marL="25400" marR="101600" marT="63500" marB="63500" anchor="ctr">
@@ -22995,14 +22995,14 @@
                         <a:buNone/>
                       </a:pPr>
                       <a:r>
-                        <a:rPr lang="en-US" sz="1600" dirty="0">
+                        <a:rPr lang="en-US" sz="1700" dirty="0">
                           <a:solidFill>
                             <a:schemeClr val="tx1"/>
                           </a:solidFill>
                         </a:rPr>
                         <a:t>Early response; post-remission choice</a:t>
                       </a:r>
-                      <a:endParaRPr lang="en-US" sz="1600" dirty="0"/>
+                      <a:endParaRPr lang="en-US" sz="1700" dirty="0"/>
                     </a:p>
                   </a:txBody>
                   <a:tcPr marL="25400" marR="101600" marT="63500" marB="63500" anchor="ctr">
@@ -23035,14 +23035,14 @@
                         <a:buNone/>
                       </a:pPr>
                       <a:r>
-                        <a:rPr lang="en-US" sz="1600" dirty="0">
+                        <a:rPr lang="en-US" sz="1700" dirty="0">
                           <a:solidFill>
                             <a:schemeClr val="tx1"/>
                           </a:solidFill>
                         </a:rPr>
                         <a:t>Response and serial pre-emptive monitoring</a:t>
                       </a:r>
-                      <a:endParaRPr lang="en-US" sz="1600" dirty="0"/>
+                      <a:endParaRPr lang="en-US" sz="1700" dirty="0"/>
                     </a:p>
                   </a:txBody>
                   <a:tcPr marL="25400" marR="101600" marT="63500" marB="63500" anchor="ctr">

--- a/slides/decks/s21-aml.pptx
+++ b/slides/decks/s21-aml.pptx
@@ -135,13 +135,13 @@
   <p:extLst>
     <p:ext uri="{521415D9-36F7-43E2-AB2F-B90AF26B5E84}">
       <p14:sectionLst xmlns:p14="http://schemas.microsoft.com/office/powerpoint/2010/main">
-        <p14:section name="Opening" id="{cee59eec-ce80-ed15-515a-9fc6e88edfc1}">
+        <p14:section name="Opening" id="{1b732d38-ba51-6b57-85f6-7d9dc33dab2a}">
           <p14:sldIdLst>
             <p14:sldId id="256"/>
             <p14:sldId id="257"/>
           </p14:sldIdLst>
         </p14:section>
-        <p14:section name="AML in CR1" id="{8f60c542-a318-14ff-d5ab-dd3d454bd039}">
+        <p14:section name="AML in CR1" id="{6819a584-6823-a3a0-58c6-a8344ec5db16}">
           <p14:sldIdLst>
             <p14:sldId id="258"/>
             <p14:sldId id="259"/>
@@ -152,14 +152,14 @@
             <p14:sldId id="264"/>
           </p14:sldIdLst>
         </p14:section>
-        <p14:section name="Advanced AML" id="{c68a558d-2b96-ccf6-6a41-320c3a95f693}">
+        <p14:section name="Advanced AML" id="{78d2e85e-43f6-c4f2-b90e-7bbd37c5acd9}">
           <p14:sldIdLst>
             <p14:sldId id="265"/>
             <p14:sldId id="266"/>
             <p14:sldId id="267"/>
           </p14:sldIdLst>
         </p14:section>
-        <p14:section name="APL and children" id="{ce3b4829-f855-e1a6-b208-b45d37adb3f1}">
+        <p14:section name="APL and children" id="{16c59ebc-8f12-0f8c-d06b-5829dcae44cf}">
           <p14:sldIdLst>
             <p14:sldId id="268"/>
             <p14:sldId id="269"/>
@@ -167,7 +167,7 @@
             <p14:sldId id="271"/>
           </p14:sldIdLst>
         </p14:section>
-        <p14:section name="Board questions" id="{c495973d-72eb-cfe3-534d-3d8f0c3dc5ef}">
+        <p14:section name="Board questions" id="{ab5814a1-97d9-39d7-0444-ab8a11663f69}">
           <p14:sldIdLst>
             <p14:sldId id="272"/>
             <p14:sldId id="273"/>
@@ -177,7 +177,7 @@
             <p14:sldId id="277"/>
           </p14:sldIdLst>
         </p14:section>
-        <p14:section name="References" id="{5a02a411-8aec-937c-e919-91f3424d8f17}">
+        <p14:section name="References" id="{46c8abb9-263b-7a5e-4d7a-e473821afc5c}">
           <p14:sldIdLst>
             <p14:sldId id="278"/>
             <p14:sldId id="279"/>
@@ -185,7 +185,7 @@
             <p14:sldId id="281"/>
           </p14:sldIdLst>
         </p14:section>
-        <p14:section name="Backup" id="{4e4f652f-be71-d10d-6029-225a80f86321}">
+        <p14:section name="Backup" id="{3697fc2d-eb3c-7101-c426-86aae1312d5c}">
           <p14:sldIdLst>
             <p14:sldId id="282"/>
             <p14:sldId id="283"/>
@@ -8130,9 +8130,9 @@
             <a:tbl>
               <a:tblPr/>
               <a:tblGrid>
-                <a:gridCol w="2423160"/>
-                <a:gridCol w="4014216"/>
-                <a:gridCol w="4379976"/>
+                <a:gridCol w="2048256"/>
+                <a:gridCol w="4288536"/>
+                <a:gridCol w="4480560"/>
               </a:tblGrid>
               <a:tr h="0">
                 <a:tc>
@@ -11275,7 +11275,7 @@
                             <a:schemeClr val="tx1"/>
                           </a:solidFill>
                         </a:rPr>
-                        <a:t>Poor-risk genetics (about 30%) ± MRD after course 1–2</a:t>
+                        <a:t>Poor-risk genetics (about 30%) ± early MRD</a:t>
                       </a:r>
                       <a:endParaRPr lang="en-US" sz="1500" dirty="0"/>
                     </a:p>
@@ -11397,7 +11397,7 @@
                             <a:schemeClr val="tx1"/>
                           </a:solidFill>
                         </a:rPr>
-                        <a:t>CBF, NPM1, CEBPA bZIP; APL; myeloid leukaemia of DS</a:t>
+                        <a:t>CBF, NPM1, CEBPA bZIP; APL; ML-DS</a:t>
                       </a:r>
                       <a:endParaRPr lang="en-US" sz="1500" dirty="0"/>
                     </a:p>
@@ -17433,9 +17433,9 @@
             <a:tbl>
               <a:tblPr/>
               <a:tblGrid>
-                <a:gridCol w="3172968"/>
+                <a:gridCol w="2980944"/>
                 <a:gridCol w="4288536"/>
-                <a:gridCol w="3355848"/>
+                <a:gridCol w="3547872"/>
               </a:tblGrid>
               <a:tr h="0">
                 <a:tc>
@@ -17672,7 +17672,7 @@
                             <a:schemeClr val="tx1"/>
                           </a:solidFill>
                         </a:rPr>
-                        <a:t>Sensitivity 80%; false-negative in 20%</a:t>
+                        <a:t>Sensitivity 80%; 20% false-negative</a:t>
                       </a:r>
                       <a:endParaRPr lang="en-US" sz="1700" dirty="0"/>
                     </a:p>
@@ -17916,7 +17916,7 @@
                             <a:schemeClr val="tx1"/>
                           </a:solidFill>
                         </a:rPr>
-                        <a:t>Occasional artefacts and contamination</a:t>
+                        <a:t>Artefacts, contamination</a:t>
                       </a:r>
                       <a:endParaRPr lang="en-US" sz="1700" dirty="0"/>
                     </a:p>
@@ -19519,7 +19519,7 @@
                             <a:schemeClr val="tx1"/>
                           </a:solidFill>
                         </a:rPr>
-                        <a:t>CR 70–90%; favorable-risk OS about 60–70%</a:t>
+                        <a:t>CR 70–90%; favorable-risk OS 60–70%</a:t>
                       </a:r>
                       <a:endParaRPr lang="en-US" sz="1500" dirty="0"/>
                     </a:p>
@@ -20416,14 +20416,14 @@
                         <a:buNone/>
                       </a:pPr>
                       <a:r>
-                        <a:rPr lang="en-US" sz="1600" b="1" dirty="0">
+                        <a:rPr lang="en-US" sz="1500" b="1" dirty="0">
                           <a:solidFill>
                             <a:schemeClr val="tx1"/>
                           </a:solidFill>
                         </a:rPr>
                         <a:t>ELN 2022</a:t>
                       </a:r>
-                      <a:endParaRPr lang="en-US" sz="1600" dirty="0"/>
+                      <a:endParaRPr lang="en-US" sz="1500" dirty="0"/>
                     </a:p>
                   </a:txBody>
                   <a:tcPr marL="25400" marR="101600" marT="63500" marB="63500" anchor="ctr">
@@ -20462,14 +20462,14 @@
                         <a:buNone/>
                       </a:pPr>
                       <a:r>
-                        <a:rPr lang="en-US" sz="1600" b="1" dirty="0">
+                        <a:rPr lang="en-US" sz="1500" b="1" dirty="0">
                           <a:solidFill>
                             <a:schemeClr val="tx1"/>
                           </a:solidFill>
                         </a:rPr>
                         <a:t>Genetic lesions (Table 70.1)</a:t>
                       </a:r>
-                      <a:endParaRPr lang="en-US" sz="1600" dirty="0"/>
+                      <a:endParaRPr lang="en-US" sz="1500" dirty="0"/>
                     </a:p>
                   </a:txBody>
                   <a:tcPr marL="25400" marR="101600" marT="63500" marB="63500" anchor="ctr">
@@ -20510,14 +20510,14 @@
                         <a:buNone/>
                       </a:pPr>
                       <a:r>
-                        <a:rPr lang="en-US" sz="1600" dirty="0">
+                        <a:rPr lang="en-US" sz="1500" dirty="0">
                           <a:solidFill>
                             <a:schemeClr val="tx1"/>
                           </a:solidFill>
                         </a:rPr>
                         <a:t>Favorable</a:t>
                       </a:r>
-                      <a:endParaRPr lang="en-US" sz="1600" dirty="0"/>
+                      <a:endParaRPr lang="en-US" sz="1500" dirty="0"/>
                     </a:p>
                   </a:txBody>
                   <a:tcPr marL="25400" marR="101600" marT="63500" marB="63500" anchor="ctr">
@@ -20550,14 +20550,14 @@
                         <a:buNone/>
                       </a:pPr>
                       <a:r>
-                        <a:rPr lang="en-US" sz="1600" dirty="0">
+                        <a:rPr lang="en-US" sz="1500" dirty="0">
                           <a:solidFill>
                             <a:schemeClr val="tx1"/>
                           </a:solidFill>
                         </a:rPr>
                         <a:t>t(8;21) RUNX1::RUNX1T1; inv(16) or t(16;16) CBFB::MYH11</a:t>
                       </a:r>
-                      <a:endParaRPr lang="en-US" sz="1600" dirty="0"/>
+                      <a:endParaRPr lang="en-US" sz="1500" dirty="0"/>
                     </a:p>
                   </a:txBody>
                   <a:tcPr marL="25400" marR="101600" marT="63500" marB="63500" anchor="ctr">
@@ -20592,14 +20592,14 @@
                         <a:buNone/>
                       </a:pPr>
                       <a:r>
-                        <a:rPr lang="en-US" sz="1600" dirty="0">
+                        <a:rPr lang="en-US" sz="1500" dirty="0">
                           <a:solidFill>
                             <a:schemeClr val="tx1"/>
                           </a:solidFill>
                         </a:rPr>
                         <a:t>Favorable</a:t>
                       </a:r>
-                      <a:endParaRPr lang="en-US" sz="1600" dirty="0"/>
+                      <a:endParaRPr lang="en-US" sz="1500" dirty="0"/>
                     </a:p>
                   </a:txBody>
                   <a:tcPr marL="25400" marR="101600" marT="63500" marB="63500" anchor="ctr">
@@ -20632,14 +20632,14 @@
                         <a:buNone/>
                       </a:pPr>
                       <a:r>
-                        <a:rPr lang="en-US" sz="1600" dirty="0">
+                        <a:rPr lang="en-US" sz="1500" dirty="0">
                           <a:solidFill>
                             <a:schemeClr val="tx1"/>
                           </a:solidFill>
                         </a:rPr>
                         <a:t>Mutated NPM1 without FLT3-ITD; bZIP in-frame mutated CEBPA</a:t>
                       </a:r>
-                      <a:endParaRPr lang="en-US" sz="1600" dirty="0"/>
+                      <a:endParaRPr lang="en-US" sz="1500" dirty="0"/>
                     </a:p>
                   </a:txBody>
                   <a:tcPr marL="25400" marR="101600" marT="63500" marB="63500" anchor="ctr">
@@ -20674,14 +20674,14 @@
                         <a:buNone/>
                       </a:pPr>
                       <a:r>
-                        <a:rPr lang="en-US" sz="1600" dirty="0">
+                        <a:rPr lang="en-US" sz="1500" dirty="0">
                           <a:solidFill>
                             <a:schemeClr val="tx1"/>
                           </a:solidFill>
                         </a:rPr>
                         <a:t>Intermediate</a:t>
                       </a:r>
-                      <a:endParaRPr lang="en-US" sz="1600" dirty="0"/>
+                      <a:endParaRPr lang="en-US" sz="1500" dirty="0"/>
                     </a:p>
                   </a:txBody>
                   <a:tcPr marL="25400" marR="101600" marT="63500" marB="63500" anchor="ctr">
@@ -20714,14 +20714,14 @@
                         <a:buNone/>
                       </a:pPr>
                       <a:r>
-                        <a:rPr lang="en-US" sz="1600" dirty="0">
+                        <a:rPr lang="en-US" sz="1500" dirty="0">
                           <a:solidFill>
                             <a:schemeClr val="tx1"/>
                           </a:solidFill>
                         </a:rPr>
                         <a:t>Mutated NPM1 with FLT3-ITD; wild-type NPM1 without FLT3-ITD</a:t>
                       </a:r>
-                      <a:endParaRPr lang="en-US" sz="1600" dirty="0"/>
+                      <a:endParaRPr lang="en-US" sz="1500" dirty="0"/>
                     </a:p>
                   </a:txBody>
                   <a:tcPr marL="25400" marR="101600" marT="63500" marB="63500" anchor="ctr">
@@ -20756,14 +20756,14 @@
                         <a:buNone/>
                       </a:pPr>
                       <a:r>
-                        <a:rPr lang="en-US" sz="1600" dirty="0">
+                        <a:rPr lang="en-US" sz="1500" dirty="0">
                           <a:solidFill>
                             <a:schemeClr val="tx1"/>
                           </a:solidFill>
                         </a:rPr>
                         <a:t>Intermediate</a:t>
                       </a:r>
-                      <a:endParaRPr lang="en-US" sz="1600" dirty="0"/>
+                      <a:endParaRPr lang="en-US" sz="1500" dirty="0"/>
                     </a:p>
                   </a:txBody>
                   <a:tcPr marL="25400" marR="101600" marT="63500" marB="63500" anchor="ctr">
@@ -20796,14 +20796,14 @@
                         <a:buNone/>
                       </a:pPr>
                       <a:r>
-                        <a:rPr lang="en-US" sz="1600" dirty="0">
+                        <a:rPr lang="en-US" sz="1500" dirty="0">
                           <a:solidFill>
                             <a:schemeClr val="tx1"/>
                           </a:solidFill>
                         </a:rPr>
                         <a:t>t(9;11) MLLT3::KMT2A; lesions neither favorable nor adverse</a:t>
                       </a:r>
-                      <a:endParaRPr lang="en-US" sz="1600" dirty="0"/>
+                      <a:endParaRPr lang="en-US" sz="1500" dirty="0"/>
                     </a:p>
                   </a:txBody>
                   <a:tcPr marL="25400" marR="101600" marT="63500" marB="63500" anchor="ctr">
@@ -20838,14 +20838,14 @@
                         <a:buNone/>
                       </a:pPr>
                       <a:r>
-                        <a:rPr lang="en-US" sz="1600" dirty="0">
+                        <a:rPr lang="en-US" sz="1500" dirty="0">
                           <a:solidFill>
                             <a:schemeClr val="tx1"/>
                           </a:solidFill>
                         </a:rPr>
                         <a:t>Adverse</a:t>
                       </a:r>
-                      <a:endParaRPr lang="en-US" sz="1600" dirty="0"/>
+                      <a:endParaRPr lang="en-US" sz="1500" dirty="0"/>
                     </a:p>
                   </a:txBody>
                   <a:tcPr marL="25400" marR="101600" marT="63500" marB="63500" anchor="ctr">
@@ -20878,14 +20878,14 @@
                         <a:buNone/>
                       </a:pPr>
                       <a:r>
-                        <a:rPr lang="en-US" sz="1600" dirty="0">
+                        <a:rPr lang="en-US" sz="1500" dirty="0">
                           <a:solidFill>
                             <a:schemeClr val="tx1"/>
                           </a:solidFill>
                         </a:rPr>
                         <a:t>t(6;9) DEK::NUP214; KMT2A-r; t(9;22) BCR::ABL1; t(8;16)</a:t>
                       </a:r>
-                      <a:endParaRPr lang="en-US" sz="1600" dirty="0"/>
+                      <a:endParaRPr lang="en-US" sz="1500" dirty="0"/>
                     </a:p>
                   </a:txBody>
                   <a:tcPr marL="25400" marR="101600" marT="63500" marB="63500" anchor="ctr">
@@ -20920,14 +20920,14 @@
                         <a:buNone/>
                       </a:pPr>
                       <a:r>
-                        <a:rPr lang="en-US" sz="1600" dirty="0">
+                        <a:rPr lang="en-US" sz="1500" dirty="0">
                           <a:solidFill>
                             <a:schemeClr val="tx1"/>
                           </a:solidFill>
                         </a:rPr>
                         <a:t>Adverse</a:t>
                       </a:r>
-                      <a:endParaRPr lang="en-US" sz="1600" dirty="0"/>
+                      <a:endParaRPr lang="en-US" sz="1500" dirty="0"/>
                     </a:p>
                   </a:txBody>
                   <a:tcPr marL="25400" marR="101600" marT="63500" marB="63500" anchor="ctr">
@@ -20960,14 +20960,14 @@
                         <a:buNone/>
                       </a:pPr>
                       <a:r>
-                        <a:rPr lang="en-US" sz="1600" dirty="0">
+                        <a:rPr lang="en-US" sz="1500" dirty="0">
                           <a:solidFill>
                             <a:schemeClr val="tx1"/>
                           </a:solidFill>
                         </a:rPr>
                         <a:t>inv(3)/t(3;3) or 3q26 MECOM-r; −5/del(5q); −7; −17/abn(17p)</a:t>
                       </a:r>
-                      <a:endParaRPr lang="en-US" sz="1600" dirty="0"/>
+                      <a:endParaRPr lang="en-US" sz="1500" dirty="0"/>
                     </a:p>
                   </a:txBody>
                   <a:tcPr marL="25400" marR="101600" marT="63500" marB="63500" anchor="ctr">
@@ -21002,14 +21002,14 @@
                         <a:buNone/>
                       </a:pPr>
                       <a:r>
-                        <a:rPr lang="en-US" sz="1600" dirty="0">
+                        <a:rPr lang="en-US" sz="1500" dirty="0">
                           <a:solidFill>
                             <a:schemeClr val="tx1"/>
                           </a:solidFill>
                         </a:rPr>
                         <a:t>Adverse</a:t>
                       </a:r>
-                      <a:endParaRPr lang="en-US" sz="1600" dirty="0"/>
+                      <a:endParaRPr lang="en-US" sz="1500" dirty="0"/>
                     </a:p>
                   </a:txBody>
                   <a:tcPr marL="25400" marR="101600" marT="63500" marB="63500" anchor="ctr">
@@ -21042,14 +21042,14 @@
                         <a:buNone/>
                       </a:pPr>
                       <a:r>
-                        <a:rPr lang="en-US" sz="1600" dirty="0">
+                        <a:rPr lang="en-US" sz="1500" dirty="0">
                           <a:solidFill>
                             <a:schemeClr val="tx1"/>
                           </a:solidFill>
                         </a:rPr>
                         <a:t>Complex (not hyperdiploid) or monosomal; TP53 VAF ≥ 10%</a:t>
                       </a:r>
-                      <a:endParaRPr lang="en-US" sz="1600" dirty="0"/>
+                      <a:endParaRPr lang="en-US" sz="1500" dirty="0"/>
                     </a:p>
                   </a:txBody>
                   <a:tcPr marL="25400" marR="101600" marT="63500" marB="63500" anchor="ctr">
@@ -21084,14 +21084,14 @@
                         <a:buNone/>
                       </a:pPr>
                       <a:r>
-                        <a:rPr lang="en-US" sz="1600" dirty="0">
+                        <a:rPr lang="en-US" sz="1500" dirty="0">
                           <a:solidFill>
                             <a:schemeClr val="tx1"/>
                           </a:solidFill>
                         </a:rPr>
                         <a:t>Adverse</a:t>
                       </a:r>
-                      <a:endParaRPr lang="en-US" sz="1600" dirty="0"/>
+                      <a:endParaRPr lang="en-US" sz="1500" dirty="0"/>
                     </a:p>
                   </a:txBody>
                   <a:tcPr marL="25400" marR="101600" marT="63500" marB="63500" anchor="ctr">
@@ -21124,14 +21124,14 @@
                         <a:buNone/>
                       </a:pPr>
                       <a:r>
-                        <a:rPr lang="en-US" sz="1600" dirty="0">
+                        <a:rPr lang="en-US" sz="1500" dirty="0">
                           <a:solidFill>
                             <a:schemeClr val="tx1"/>
                           </a:solidFill>
                         </a:rPr>
                         <a:t>ASXL1, BCOR, EZH2, RUNX1, SF3B1, SRSF2, STAG2, U2AF1, ZRSR2</a:t>
                       </a:r>
-                      <a:endParaRPr lang="en-US" sz="1600" dirty="0"/>
+                      <a:endParaRPr lang="en-US" sz="1500" dirty="0"/>
                     </a:p>
                   </a:txBody>
                   <a:tcPr marL="25400" marR="101600" marT="63500" marB="63500" anchor="ctr">
@@ -22512,7 +22512,7 @@
                             <a:schemeClr val="tx1"/>
                           </a:solidFill>
                         </a:rPr>
-                        <a:t>Leukaemia-aberrant or different-from-normal phenotype</a:t>
+                        <a:t>LAIP or different-from-normal phenotype</a:t>
                       </a:r>
                       <a:endParaRPr lang="en-US" sz="1700" dirty="0"/>
                     </a:p>
@@ -23040,7 +23040,7 @@
                             <a:schemeClr val="tx1"/>
                           </a:solidFill>
                         </a:rPr>
-                        <a:t>Response and serial pre-emptive monitoring</a:t>
+                        <a:t>Serial pre-emptive monitoring</a:t>
                       </a:r>
                       <a:endParaRPr lang="en-US" sz="1700" dirty="0"/>
                     </a:p>
@@ -23101,7 +23101,7 @@
                   <a:schemeClr val="tx1"/>
                 </a:solidFill>
               </a:rPr>
-              <a:t>Ch. 70: MRD negativity is an ELN response end point in haematological CR. Ch. 71: about a quarter with flow MRD ≤ 0.1% after course 1 still relapse.</a:t>
+              <a:t>Ch. 70: MRD negativity is an ELN response end point. Ch. 71: about ¼ with flow MRD ≤ 0.1% after course 1 still relapse.</a:t>
             </a:r>
             <a:endParaRPr lang="en-US" sz="1600" dirty="0"/>
           </a:p>

--- a/slides/decks/s21-aml.pptx
+++ b/slides/decks/s21-aml.pptx
@@ -135,13 +135,13 @@
   <p:extLst>
     <p:ext uri="{521415D9-36F7-43E2-AB2F-B90AF26B5E84}">
       <p14:sectionLst xmlns:p14="http://schemas.microsoft.com/office/powerpoint/2010/main">
-        <p14:section name="Opening" id="{1b732d38-ba51-6b57-85f6-7d9dc33dab2a}">
+        <p14:section name="Opening" id="{d6bd5f17-fc60-ff4b-6252-a728b9fcb1aa}">
           <p14:sldIdLst>
             <p14:sldId id="256"/>
             <p14:sldId id="257"/>
           </p14:sldIdLst>
         </p14:section>
-        <p14:section name="AML in CR1" id="{6819a584-6823-a3a0-58c6-a8344ec5db16}">
+        <p14:section name="AML in CR1" id="{bbd75bda-4414-dfd8-275e-8273b5e9cee0}">
           <p14:sldIdLst>
             <p14:sldId id="258"/>
             <p14:sldId id="259"/>
@@ -152,14 +152,14 @@
             <p14:sldId id="264"/>
           </p14:sldIdLst>
         </p14:section>
-        <p14:section name="Advanced AML" id="{78d2e85e-43f6-c4f2-b90e-7bbd37c5acd9}">
+        <p14:section name="Advanced AML" id="{a935eb54-2f32-f73d-7f5b-169c5cdbc617}">
           <p14:sldIdLst>
             <p14:sldId id="265"/>
             <p14:sldId id="266"/>
             <p14:sldId id="267"/>
           </p14:sldIdLst>
         </p14:section>
-        <p14:section name="APL and children" id="{16c59ebc-8f12-0f8c-d06b-5829dcae44cf}">
+        <p14:section name="APL and children" id="{b59f6a3e-0ee0-d309-ce30-b84e9f2796a4}">
           <p14:sldIdLst>
             <p14:sldId id="268"/>
             <p14:sldId id="269"/>
@@ -167,7 +167,7 @@
             <p14:sldId id="271"/>
           </p14:sldIdLst>
         </p14:section>
-        <p14:section name="Board questions" id="{ab5814a1-97d9-39d7-0444-ab8a11663f69}">
+        <p14:section name="Board questions" id="{3074b02a-2297-d418-a1f2-c9758b0ff1d0}">
           <p14:sldIdLst>
             <p14:sldId id="272"/>
             <p14:sldId id="273"/>
@@ -177,7 +177,7 @@
             <p14:sldId id="277"/>
           </p14:sldIdLst>
         </p14:section>
-        <p14:section name="References" id="{46c8abb9-263b-7a5e-4d7a-e473821afc5c}">
+        <p14:section name="References" id="{f38e5346-18fa-5cc9-2b4e-ab5040460314}">
           <p14:sldIdLst>
             <p14:sldId id="278"/>
             <p14:sldId id="279"/>
@@ -185,7 +185,7 @@
             <p14:sldId id="281"/>
           </p14:sldIdLst>
         </p14:section>
-        <p14:section name="Backup" id="{3697fc2d-eb3c-7101-c426-86aae1312d5c}">
+        <p14:section name="Backup" id="{f50b6650-aebe-770b-2530-040ec10add0d}">
           <p14:sldIdLst>
             <p14:sldId id="282"/>
             <p14:sldId id="283"/>
@@ -11924,7 +11924,7 @@
         </p:nvSpPr>
         <p:spPr>
           <a:xfrm>
-            <a:off x="685800" y="5486400"/>
+            <a:off x="685800" y="4663440"/>
             <a:ext cx="10817352" cy="411480"/>
           </a:xfrm>
           <a:prstGeom prst="rect">
@@ -17632,7 +17632,7 @@
                             <a:schemeClr val="tx1"/>
                           </a:solidFill>
                         </a:rPr>
-                        <a:t>Very specific; extra anomalies in 30% (+8 most often)</a:t>
+                        <a:t>Very specific; extra anomalies in 30%</a:t>
                       </a:r>
                       <a:endParaRPr lang="en-US" sz="1700" dirty="0"/>
                     </a:p>
@@ -17672,7 +17672,7 @@
                             <a:schemeClr val="tx1"/>
                           </a:solidFill>
                         </a:rPr>
-                        <a:t>Sensitivity 80%; 20% false-negative</a:t>
+                        <a:t>Sensitivity 80%</a:t>
                       </a:r>
                       <a:endParaRPr lang="en-US" sz="1700" dirty="0"/>
                     </a:p>
@@ -17876,7 +17876,7 @@
                             <a:schemeClr val="tx1"/>
                           </a:solidFill>
                         </a:rPr>
-                        <a:t>Specific, rapid, sensitive; isoform allows MRD</a:t>
+                        <a:t>Specific, sensitive; isoform for MRD</a:t>
                       </a:r>
                       <a:endParaRPr lang="en-US" sz="1700" dirty="0"/>
                     </a:p>
@@ -17998,7 +17998,7 @@
                             <a:schemeClr val="tx1"/>
                           </a:solidFill>
                         </a:rPr>
-                        <a:t>Specific, rapid, cheap; microspeckled pattern</a:t>
+                        <a:t>Rapid, cheap; microspeckled pattern</a:t>
                       </a:r>
                       <a:endParaRPr lang="en-US" sz="1700" dirty="0"/>
                     </a:p>
@@ -18193,6 +18193,42 @@
       </p:graphicFrame>
       <p:sp>
         <p:nvSpPr>
+          <p:cNvPr id="7" name="Text 88"/>
+          <p:cNvSpPr txBox="1"/>
+          <p:nvPr/>
+        </p:nvSpPr>
+        <p:spPr>
+          <a:xfrm>
+            <a:off x="685800" y="4480560"/>
+            <a:ext cx="10817352" cy="411480"/>
+          </a:xfrm>
+          <a:prstGeom prst="rect">
+            <a:avLst/>
+          </a:prstGeom>
+          <a:noFill/>
+          <a:ln/>
+        </p:spPr>
+        <p:txBody>
+          <a:bodyPr wrap="square" lIns="0" tIns="0" rIns="0" bIns="0" rtlCol="0" anchor="t"/>
+          <a:lstStyle/>
+          <a:p>
+            <a:pPr indent="0" marL="0">
+              <a:buNone/>
+            </a:pPr>
+            <a:r>
+              <a:rPr lang="en-US" sz="1600" b="1" dirty="0">
+                <a:solidFill>
+                  <a:schemeClr val="tx1"/>
+                </a:solidFill>
+              </a:rPr>
+              <a:t>+8 is the commonest extra anomaly; karyotype is falsely negative or inadequate in 20%.</a:t>
+            </a:r>
+            <a:endParaRPr lang="en-US" sz="1600" dirty="0"/>
+          </a:p>
+        </p:txBody>
+      </p:sp>
+      <p:sp>
+        <p:nvSpPr>
           <p:cNvPr id="25" name="Slide Number Placeholder 0"/>
           <p:cNvSpPr>
             <a:spLocks noGrp="1"/>
@@ -18377,7 +18413,7 @@
       </p:sp>
       <p:graphicFrame>
         <p:nvGraphicFramePr>
-          <p:cNvPr id="30" name="Table 88"/>
+          <p:cNvPr id="30" name="Table 89"/>
           <p:cNvGraphicFramePr>
             <a:graphicFrameLocks noGrp="1"/>
           </p:cNvGraphicFramePr>
@@ -23079,7 +23115,7 @@
         </p:nvSpPr>
         <p:spPr>
           <a:xfrm>
-            <a:off x="685800" y="5486400"/>
+            <a:off x="685800" y="4572000"/>
             <a:ext cx="10817352" cy="411480"/>
           </a:xfrm>
           <a:prstGeom prst="rect">
@@ -23101,7 +23137,7 @@
                   <a:schemeClr val="tx1"/>
                 </a:solidFill>
               </a:rPr>
-              <a:t>Ch. 70: MRD negativity is an ELN response end point. Ch. 71: about ¼ with flow MRD ≤ 0.1% after course 1 still relapse.</a:t>
+              <a:t>Ch. 71: about a quarter with flow MRD ≤ 0.1% after course 1 still relapse.</a:t>
             </a:r>
             <a:endParaRPr lang="en-US" sz="1600" dirty="0"/>
           </a:p>

--- a/slides/decks/s21-aml.pptx
+++ b/slides/decks/s21-aml.pptx
@@ -135,13 +135,13 @@
   <p:extLst>
     <p:ext uri="{521415D9-36F7-43E2-AB2F-B90AF26B5E84}">
       <p14:sectionLst xmlns:p14="http://schemas.microsoft.com/office/powerpoint/2010/main">
-        <p14:section name="Opening" id="{d6bd5f17-fc60-ff4b-6252-a728b9fcb1aa}">
+        <p14:section name="Opening" id="{9579f7b9-227b-1987-2657-67a47ee59c24}">
           <p14:sldIdLst>
             <p14:sldId id="256"/>
             <p14:sldId id="257"/>
           </p14:sldIdLst>
         </p14:section>
-        <p14:section name="AML in CR1" id="{bbd75bda-4414-dfd8-275e-8273b5e9cee0}">
+        <p14:section name="AML in CR1" id="{6f4eaae4-3d81-f0d5-477b-3c57d0791348}">
           <p14:sldIdLst>
             <p14:sldId id="258"/>
             <p14:sldId id="259"/>
@@ -152,14 +152,14 @@
             <p14:sldId id="264"/>
           </p14:sldIdLst>
         </p14:section>
-        <p14:section name="Advanced AML" id="{a935eb54-2f32-f73d-7f5b-169c5cdbc617}">
+        <p14:section name="Advanced AML" id="{c34f1e5e-eca2-2b12-2e60-7094aa90290e}">
           <p14:sldIdLst>
             <p14:sldId id="265"/>
             <p14:sldId id="266"/>
             <p14:sldId id="267"/>
           </p14:sldIdLst>
         </p14:section>
-        <p14:section name="APL and children" id="{b59f6a3e-0ee0-d309-ce30-b84e9f2796a4}">
+        <p14:section name="APL and children" id="{0ce66ce9-429c-d863-c010-0948269267dc}">
           <p14:sldIdLst>
             <p14:sldId id="268"/>
             <p14:sldId id="269"/>
@@ -167,7 +167,7 @@
             <p14:sldId id="271"/>
           </p14:sldIdLst>
         </p14:section>
-        <p14:section name="Board questions" id="{3074b02a-2297-d418-a1f2-c9758b0ff1d0}">
+        <p14:section name="Board questions" id="{64942ada-555e-4326-c9c5-29e49796fc49}">
           <p14:sldIdLst>
             <p14:sldId id="272"/>
             <p14:sldId id="273"/>
@@ -177,7 +177,7 @@
             <p14:sldId id="277"/>
           </p14:sldIdLst>
         </p14:section>
-        <p14:section name="References" id="{f38e5346-18fa-5cc9-2b4e-ab5040460314}">
+        <p14:section name="References" id="{21e30bfe-e9b1-6eba-2d22-63f55b1ad021}">
           <p14:sldIdLst>
             <p14:sldId id="278"/>
             <p14:sldId id="279"/>
@@ -185,7 +185,7 @@
             <p14:sldId id="281"/>
           </p14:sldIdLst>
         </p14:section>
-        <p14:section name="Backup" id="{f50b6650-aebe-770b-2530-040ec10add0d}">
+        <p14:section name="Backup" id="{34358fe2-e17a-1be5-ca48-b47d292c64fc}">
           <p14:sldIdLst>
             <p14:sldId id="282"/>
             <p14:sldId id="283"/>
@@ -11050,14 +11050,14 @@
                         <a:buNone/>
                       </a:pPr>
                       <a:r>
-                        <a:rPr lang="en-US" sz="1500" b="1" dirty="0">
+                        <a:rPr lang="en-US" sz="1600" b="1" dirty="0">
                           <a:solidFill>
                             <a:schemeClr val="tx1"/>
                           </a:solidFill>
                         </a:rPr>
                         <a:t>Topic</a:t>
                       </a:r>
-                      <a:endParaRPr lang="en-US" sz="1500" dirty="0"/>
+                      <a:endParaRPr lang="en-US" sz="1600" dirty="0"/>
                     </a:p>
                   </a:txBody>
                   <a:tcPr marL="25400" marR="101600" marT="63500" marB="63500" anchor="ctr">
@@ -11096,14 +11096,14 @@
                         <a:buNone/>
                       </a:pPr>
                       <a:r>
-                        <a:rPr lang="en-US" sz="1500" b="1" dirty="0">
+                        <a:rPr lang="en-US" sz="1600" b="1" dirty="0">
                           <a:solidFill>
                             <a:schemeClr val="tx1"/>
                           </a:solidFill>
                         </a:rPr>
                         <a:t>Adults (Ch. 70)</a:t>
                       </a:r>
-                      <a:endParaRPr lang="en-US" sz="1500" dirty="0"/>
+                      <a:endParaRPr lang="en-US" sz="1600" dirty="0"/>
                     </a:p>
                   </a:txBody>
                   <a:tcPr marL="25400" marR="101600" marT="63500" marB="63500" anchor="ctr">
@@ -11142,14 +11142,14 @@
                         <a:buNone/>
                       </a:pPr>
                       <a:r>
-                        <a:rPr lang="en-US" sz="1500" b="1" dirty="0">
+                        <a:rPr lang="en-US" sz="1600" b="1" dirty="0">
                           <a:solidFill>
                             <a:schemeClr val="tx1"/>
                           </a:solidFill>
                         </a:rPr>
                         <a:t>Children (Ch. 71)</a:t>
                       </a:r>
-                      <a:endParaRPr lang="en-US" sz="1500" dirty="0"/>
+                      <a:endParaRPr lang="en-US" sz="1600" dirty="0"/>
                     </a:p>
                   </a:txBody>
                   <a:tcPr marL="25400" marR="101600" marT="63500" marB="63500" anchor="ctr">
@@ -11190,14 +11190,14 @@
                         <a:buNone/>
                       </a:pPr>
                       <a:r>
-                        <a:rPr lang="en-US" sz="1500" dirty="0">
+                        <a:rPr lang="en-US" sz="1600" dirty="0">
                           <a:solidFill>
                             <a:schemeClr val="tx1"/>
                           </a:solidFill>
                         </a:rPr>
                         <a:t>CR1 indication</a:t>
                       </a:r>
-                      <a:endParaRPr lang="en-US" sz="1500" dirty="0"/>
+                      <a:endParaRPr lang="en-US" sz="1600" dirty="0"/>
                     </a:p>
                   </a:txBody>
                   <a:tcPr marL="25400" marR="101600" marT="63500" marB="63500" anchor="ctr">
@@ -11230,14 +11230,14 @@
                         <a:buNone/>
                       </a:pPr>
                       <a:r>
-                        <a:rPr lang="en-US" sz="1500" dirty="0">
+                        <a:rPr lang="en-US" sz="1600" dirty="0">
                           <a:solidFill>
                             <a:schemeClr val="tx1"/>
                           </a:solidFill>
                         </a:rPr>
                         <a:t>ELN 2022 risk + MRD + TRM</a:t>
                       </a:r>
-                      <a:endParaRPr lang="en-US" sz="1500" dirty="0"/>
+                      <a:endParaRPr lang="en-US" sz="1600" dirty="0"/>
                     </a:p>
                   </a:txBody>
                   <a:tcPr marL="25400" marR="101600" marT="63500" marB="63500" anchor="ctr">
@@ -11270,14 +11270,14 @@
                         <a:buNone/>
                       </a:pPr>
                       <a:r>
-                        <a:rPr lang="en-US" sz="1500" dirty="0">
+                        <a:rPr lang="en-US" sz="1600" dirty="0">
                           <a:solidFill>
                             <a:schemeClr val="tx1"/>
                           </a:solidFill>
                         </a:rPr>
                         <a:t>Poor-risk genetics (about 30%) ± early MRD</a:t>
                       </a:r>
-                      <a:endParaRPr lang="en-US" sz="1500" dirty="0"/>
+                      <a:endParaRPr lang="en-US" sz="1600" dirty="0"/>
                     </a:p>
                   </a:txBody>
                   <a:tcPr marL="25400" marR="101600" marT="63500" marB="63500" anchor="ctr">
@@ -11312,14 +11312,14 @@
                         <a:buNone/>
                       </a:pPr>
                       <a:r>
-                        <a:rPr lang="en-US" sz="1500" dirty="0">
+                        <a:rPr lang="en-US" sz="1600" dirty="0">
                           <a:solidFill>
                             <a:schemeClr val="tx1"/>
                           </a:solidFill>
                         </a:rPr>
                         <a:t>No HCT in CR1</a:t>
                       </a:r>
-                      <a:endParaRPr lang="en-US" sz="1500" dirty="0"/>
+                      <a:endParaRPr lang="en-US" sz="1600" dirty="0"/>
                     </a:p>
                   </a:txBody>
                   <a:tcPr marL="25400" marR="101600" marT="63500" marB="63500" anchor="ctr">
@@ -11352,14 +11352,14 @@
                         <a:buNone/>
                       </a:pPr>
                       <a:r>
-                        <a:rPr lang="en-US" sz="1500" dirty="0">
+                        <a:rPr lang="en-US" sz="1600" dirty="0">
                           <a:solidFill>
                             <a:schemeClr val="tx1"/>
                           </a:solidFill>
                         </a:rPr>
                         <a:t>Favorable MRD−; APL in molecular CR</a:t>
                       </a:r>
-                      <a:endParaRPr lang="en-US" sz="1500" dirty="0"/>
+                      <a:endParaRPr lang="en-US" sz="1600" dirty="0"/>
                     </a:p>
                   </a:txBody>
                   <a:tcPr marL="25400" marR="101600" marT="63500" marB="63500" anchor="ctr">
@@ -11392,14 +11392,14 @@
                         <a:buNone/>
                       </a:pPr>
                       <a:r>
-                        <a:rPr lang="en-US" sz="1500" dirty="0">
+                        <a:rPr lang="en-US" sz="1600" dirty="0">
                           <a:solidFill>
                             <a:schemeClr val="tx1"/>
                           </a:solidFill>
                         </a:rPr>
                         <a:t>CBF, NPM1, CEBPA bZIP; APL; ML-DS</a:t>
                       </a:r>
-                      <a:endParaRPr lang="en-US" sz="1500" dirty="0"/>
+                      <a:endParaRPr lang="en-US" sz="1600" dirty="0"/>
                     </a:p>
                   </a:txBody>
                   <a:tcPr marL="25400" marR="101600" marT="63500" marB="63500" anchor="ctr">
@@ -11434,14 +11434,14 @@
                         <a:buNone/>
                       </a:pPr>
                       <a:r>
-                        <a:rPr lang="en-US" sz="1500" dirty="0">
+                        <a:rPr lang="en-US" sz="1600" dirty="0">
                           <a:solidFill>
                             <a:schemeClr val="tx1"/>
                           </a:solidFill>
                         </a:rPr>
                         <a:t>Conditioning</a:t>
                       </a:r>
-                      <a:endParaRPr lang="en-US" sz="1500" dirty="0"/>
+                      <a:endParaRPr lang="en-US" sz="1600" dirty="0"/>
                     </a:p>
                   </a:txBody>
                   <a:tcPr marL="25400" marR="101600" marT="63500" marB="63500" anchor="ctr">
@@ -11474,14 +11474,14 @@
                         <a:buNone/>
                       </a:pPr>
                       <a:r>
-                        <a:rPr lang="en-US" sz="1500" dirty="0">
+                        <a:rPr lang="en-US" sz="1600" dirty="0">
                           <a:solidFill>
                             <a:schemeClr val="tx1"/>
                           </a:solidFill>
                         </a:rPr>
                         <a:t>MAC if &lt; 50 y (refractory); RIC otherwise</a:t>
                       </a:r>
-                      <a:endParaRPr lang="en-US" sz="1500" dirty="0"/>
+                      <a:endParaRPr lang="en-US" sz="1600" dirty="0"/>
                     </a:p>
                   </a:txBody>
                   <a:tcPr marL="25400" marR="101600" marT="63500" marB="63500" anchor="ctr">
@@ -11514,14 +11514,14 @@
                         <a:buNone/>
                       </a:pPr>
                       <a:r>
-                        <a:rPr lang="en-US" sz="1500" dirty="0">
+                        <a:rPr lang="en-US" sz="1600" dirty="0">
                           <a:solidFill>
                             <a:schemeClr val="tx1"/>
                           </a:solidFill>
                         </a:rPr>
                         <a:t>MAC, TBI-free; BU/CY with BU drug monitoring</a:t>
                       </a:r>
-                      <a:endParaRPr lang="en-US" sz="1500" dirty="0"/>
+                      <a:endParaRPr lang="en-US" sz="1600" dirty="0"/>
                     </a:p>
                   </a:txBody>
                   <a:tcPr marL="25400" marR="101600" marT="63500" marB="63500" anchor="ctr">
@@ -11556,14 +11556,14 @@
                         <a:buNone/>
                       </a:pPr>
                       <a:r>
-                        <a:rPr lang="en-US" sz="1500" dirty="0">
+                        <a:rPr lang="en-US" sz="1600" dirty="0">
                           <a:solidFill>
                             <a:schemeClr val="tx1"/>
                           </a:solidFill>
                         </a:rPr>
                         <a:t>Donor and source</a:t>
                       </a:r>
-                      <a:endParaRPr lang="en-US" sz="1500" dirty="0"/>
+                      <a:endParaRPr lang="en-US" sz="1600" dirty="0"/>
                     </a:p>
                   </a:txBody>
                   <a:tcPr marL="25400" marR="101600" marT="63500" marB="63500" anchor="ctr">
@@ -11596,14 +11596,14 @@
                         <a:buNone/>
                       </a:pPr>
                       <a:r>
-                        <a:rPr lang="en-US" sz="1500" dirty="0">
+                        <a:rPr lang="en-US" sz="1600" dirty="0">
                           <a:solidFill>
                             <a:schemeClr val="tx1"/>
                           </a:solidFill>
                         </a:rPr>
                         <a:t>Mostly unrelated or haplo; mostly PBSC</a:t>
                       </a:r>
-                      <a:endParaRPr lang="en-US" sz="1500" dirty="0"/>
+                      <a:endParaRPr lang="en-US" sz="1600" dirty="0"/>
                     </a:p>
                   </a:txBody>
                   <a:tcPr marL="25400" marR="101600" marT="63500" marB="63500" anchor="ctr">
@@ -11636,14 +11636,14 @@
                         <a:buNone/>
                       </a:pPr>
                       <a:r>
-                        <a:rPr lang="en-US" sz="1500" dirty="0">
+                        <a:rPr lang="en-US" sz="1600" dirty="0">
                           <a:solidFill>
                             <a:schemeClr val="tx1"/>
                           </a:solidFill>
                         </a:rPr>
                         <a:t>MFD or MUD; bone marrow preferred</a:t>
                       </a:r>
-                      <a:endParaRPr lang="en-US" sz="1500" dirty="0"/>
+                      <a:endParaRPr lang="en-US" sz="1600" dirty="0"/>
                     </a:p>
                   </a:txBody>
                   <a:tcPr marL="25400" marR="101600" marT="63500" marB="63500" anchor="ctr">
@@ -11678,14 +11678,14 @@
                         <a:buNone/>
                       </a:pPr>
                       <a:r>
-                        <a:rPr lang="en-US" sz="1500" dirty="0">
+                        <a:rPr lang="en-US" sz="1600" dirty="0">
                           <a:solidFill>
                             <a:schemeClr val="tx1"/>
                           </a:solidFill>
                         </a:rPr>
                         <a:t>TRM</a:t>
                       </a:r>
-                      <a:endParaRPr lang="en-US" sz="1500" dirty="0"/>
+                      <a:endParaRPr lang="en-US" sz="1600" dirty="0"/>
                     </a:p>
                   </a:txBody>
                   <a:tcPr marL="25400" marR="101600" marT="63500" marB="63500" anchor="ctr">
@@ -11718,14 +11718,14 @@
                         <a:buNone/>
                       </a:pPr>
                       <a:r>
-                        <a:rPr lang="en-US" sz="1500" dirty="0">
+                        <a:rPr lang="en-US" sz="1600" dirty="0">
                           <a:solidFill>
                             <a:schemeClr val="tx1"/>
                           </a:solidFill>
                         </a:rPr>
                         <a:t>Estimate with HCT-CI or EBMT score</a:t>
                       </a:r>
-                      <a:endParaRPr lang="en-US" sz="1500" dirty="0"/>
+                      <a:endParaRPr lang="en-US" sz="1600" dirty="0"/>
                     </a:p>
                   </a:txBody>
                   <a:tcPr marL="25400" marR="101600" marT="63500" marB="63500" anchor="ctr">
@@ -11758,14 +11758,14 @@
                         <a:buNone/>
                       </a:pPr>
                       <a:r>
-                        <a:rPr lang="en-US" sz="1500" dirty="0">
+                        <a:rPr lang="en-US" sz="1600" dirty="0">
                           <a:solidFill>
                             <a:schemeClr val="tx1"/>
                           </a:solidFill>
                         </a:rPr>
                         <a:t>Below 10% achievable in CR1</a:t>
                       </a:r>
-                      <a:endParaRPr lang="en-US" sz="1500" dirty="0"/>
+                      <a:endParaRPr lang="en-US" sz="1600" dirty="0"/>
                     </a:p>
                   </a:txBody>
                   <a:tcPr marL="25400" marR="101600" marT="63500" marB="63500" anchor="ctr">
@@ -11800,14 +11800,14 @@
                         <a:buNone/>
                       </a:pPr>
                       <a:r>
-                        <a:rPr lang="en-US" sz="1500" dirty="0">
+                        <a:rPr lang="en-US" sz="1600" dirty="0">
                           <a:solidFill>
                             <a:schemeClr val="tx1"/>
                           </a:solidFill>
                         </a:rPr>
                         <a:t>Relapse</a:t>
                       </a:r>
-                      <a:endParaRPr lang="en-US" sz="1500" dirty="0"/>
+                      <a:endParaRPr lang="en-US" sz="1600" dirty="0"/>
                     </a:p>
                   </a:txBody>
                   <a:tcPr marL="25400" marR="101600" marT="63500" marB="63500" anchor="ctr">
@@ -11840,14 +11840,14 @@
                         <a:buNone/>
                       </a:pPr>
                       <a:r>
-                        <a:rPr lang="en-US" sz="1500" dirty="0">
+                        <a:rPr lang="en-US" sz="1600" dirty="0">
                           <a:solidFill>
                             <a:schemeClr val="tx1"/>
                           </a:solidFill>
                         </a:rPr>
                         <a:t>Main cause of failure after HCT</a:t>
                       </a:r>
-                      <a:endParaRPr lang="en-US" sz="1500" dirty="0"/>
+                      <a:endParaRPr lang="en-US" sz="1600" dirty="0"/>
                     </a:p>
                   </a:txBody>
                   <a:tcPr marL="25400" marR="101600" marT="63500" marB="63500" anchor="ctr">
@@ -11880,14 +11880,14 @@
                         <a:buNone/>
                       </a:pPr>
                       <a:r>
-                        <a:rPr lang="en-US" sz="1500" dirty="0">
+                        <a:rPr lang="en-US" sz="1600" dirty="0">
                           <a:solidFill>
                             <a:schemeClr val="tx1"/>
                           </a:solidFill>
                         </a:rPr>
                         <a:t>CR2 then HCT; second HCT TRM &gt; 30%</a:t>
                       </a:r>
-                      <a:endParaRPr lang="en-US" sz="1500" dirty="0"/>
+                      <a:endParaRPr lang="en-US" sz="1600" dirty="0"/>
                     </a:p>
                   </a:txBody>
                   <a:tcPr marL="25400" marR="101600" marT="63500" marB="63500" anchor="ctr">
@@ -11924,7 +11924,7 @@
         </p:nvSpPr>
         <p:spPr>
           <a:xfrm>
-            <a:off x="685800" y="4663440"/>
+            <a:off x="685800" y="5029200"/>
             <a:ext cx="10817352" cy="411480"/>
           </a:xfrm>
           <a:prstGeom prst="rect">
@@ -18199,7 +18199,7 @@
         </p:nvSpPr>
         <p:spPr>
           <a:xfrm>
-            <a:off x="685800" y="4480560"/>
+            <a:off x="685800" y="4709160"/>
             <a:ext cx="10817352" cy="411480"/>
           </a:xfrm>
           <a:prstGeom prst="rect">
@@ -23115,7 +23115,7 @@
         </p:nvSpPr>
         <p:spPr>
           <a:xfrm>
-            <a:off x="685800" y="4572000"/>
+            <a:off x="685800" y="4754880"/>
             <a:ext cx="10817352" cy="411480"/>
           </a:xfrm>
           <a:prstGeom prst="rect">

--- a/slides/decks/s21-aml.pptx
+++ b/slides/decks/s21-aml.pptx
@@ -135,13 +135,13 @@
   <p:extLst>
     <p:ext uri="{521415D9-36F7-43E2-AB2F-B90AF26B5E84}">
       <p14:sectionLst xmlns:p14="http://schemas.microsoft.com/office/powerpoint/2010/main">
-        <p14:section name="Opening" id="{9579f7b9-227b-1987-2657-67a47ee59c24}">
+        <p14:section name="Opening" id="{ce3d2d5b-2bd2-3741-2029-91a8f4f18daf}">
           <p14:sldIdLst>
             <p14:sldId id="256"/>
             <p14:sldId id="257"/>
           </p14:sldIdLst>
         </p14:section>
-        <p14:section name="AML in CR1" id="{6f4eaae4-3d81-f0d5-477b-3c57d0791348}">
+        <p14:section name="AML in CR1" id="{48b5dd0d-eb7b-d708-89db-35d7cf130754}">
           <p14:sldIdLst>
             <p14:sldId id="258"/>
             <p14:sldId id="259"/>
@@ -152,14 +152,14 @@
             <p14:sldId id="264"/>
           </p14:sldIdLst>
         </p14:section>
-        <p14:section name="Advanced AML" id="{c34f1e5e-eca2-2b12-2e60-7094aa90290e}">
+        <p14:section name="Advanced AML" id="{2d18a50e-683f-c939-510f-9ed4581f0d94}">
           <p14:sldIdLst>
             <p14:sldId id="265"/>
             <p14:sldId id="266"/>
             <p14:sldId id="267"/>
           </p14:sldIdLst>
         </p14:section>
-        <p14:section name="APL and children" id="{0ce66ce9-429c-d863-c010-0948269267dc}">
+        <p14:section name="APL and children" id="{419406a6-7974-d7b7-cf72-9deeab42addd}">
           <p14:sldIdLst>
             <p14:sldId id="268"/>
             <p14:sldId id="269"/>
@@ -167,7 +167,7 @@
             <p14:sldId id="271"/>
           </p14:sldIdLst>
         </p14:section>
-        <p14:section name="Board questions" id="{64942ada-555e-4326-c9c5-29e49796fc49}">
+        <p14:section name="Board questions" id="{f051e197-0903-0dfb-1aff-ecf63858dc8f}">
           <p14:sldIdLst>
             <p14:sldId id="272"/>
             <p14:sldId id="273"/>
@@ -177,7 +177,7 @@
             <p14:sldId id="277"/>
           </p14:sldIdLst>
         </p14:section>
-        <p14:section name="References" id="{21e30bfe-e9b1-6eba-2d22-63f55b1ad021}">
+        <p14:section name="References" id="{57777e25-e403-596f-36a0-f1c6583f9d44}">
           <p14:sldIdLst>
             <p14:sldId id="278"/>
             <p14:sldId id="279"/>
@@ -185,7 +185,7 @@
             <p14:sldId id="281"/>
           </p14:sldIdLst>
         </p14:section>
-        <p14:section name="Backup" id="{34358fe2-e17a-1be5-ca48-b47d292c64fc}">
+        <p14:section name="Backup" id="{1b34ed18-0fdd-5e10-0f94-8fc908b78b14}">
           <p14:sldIdLst>
             <p14:sldId id="282"/>
             <p14:sldId id="283"/>

--- a/slides/decks/s21-aml.pptx
+++ b/slides/decks/s21-aml.pptx
@@ -135,13 +135,13 @@
   <p:extLst>
     <p:ext uri="{521415D9-36F7-43E2-AB2F-B90AF26B5E84}">
       <p14:sectionLst xmlns:p14="http://schemas.microsoft.com/office/powerpoint/2010/main">
-        <p14:section name="Opening" id="{ce3d2d5b-2bd2-3741-2029-91a8f4f18daf}">
+        <p14:section name="Opening" id="{42f8e4f0-9ffa-4b3f-173f-451e00e62b3e}">
           <p14:sldIdLst>
             <p14:sldId id="256"/>
             <p14:sldId id="257"/>
           </p14:sldIdLst>
         </p14:section>
-        <p14:section name="AML in CR1" id="{48b5dd0d-eb7b-d708-89db-35d7cf130754}">
+        <p14:section name="AML in CR1" id="{5c627105-0292-3e71-2d09-73c325bf9099}">
           <p14:sldIdLst>
             <p14:sldId id="258"/>
             <p14:sldId id="259"/>
@@ -152,14 +152,14 @@
             <p14:sldId id="264"/>
           </p14:sldIdLst>
         </p14:section>
-        <p14:section name="Advanced AML" id="{2d18a50e-683f-c939-510f-9ed4581f0d94}">
+        <p14:section name="Advanced AML" id="{72732df7-aaa4-3dd6-f118-f4571ed1b478}">
           <p14:sldIdLst>
             <p14:sldId id="265"/>
             <p14:sldId id="266"/>
             <p14:sldId id="267"/>
           </p14:sldIdLst>
         </p14:section>
-        <p14:section name="APL and children" id="{419406a6-7974-d7b7-cf72-9deeab42addd}">
+        <p14:section name="APL and children" id="{eac0f929-6e99-dfd2-acd2-14b666adeb9d}">
           <p14:sldIdLst>
             <p14:sldId id="268"/>
             <p14:sldId id="269"/>
@@ -167,7 +167,7 @@
             <p14:sldId id="271"/>
           </p14:sldIdLst>
         </p14:section>
-        <p14:section name="Board questions" id="{f051e197-0903-0dfb-1aff-ecf63858dc8f}">
+        <p14:section name="Board questions" id="{8fe274c5-4ccf-5792-e6a8-18a838a4c3ce}">
           <p14:sldIdLst>
             <p14:sldId id="272"/>
             <p14:sldId id="273"/>
@@ -177,7 +177,7 @@
             <p14:sldId id="277"/>
           </p14:sldIdLst>
         </p14:section>
-        <p14:section name="References" id="{57777e25-e403-596f-36a0-f1c6583f9d44}">
+        <p14:section name="References" id="{b0760968-ceb4-06ab-5ba2-578c83063e9b}">
           <p14:sldIdLst>
             <p14:sldId id="278"/>
             <p14:sldId id="279"/>
@@ -185,7 +185,7 @@
             <p14:sldId id="281"/>
           </p14:sldIdLst>
         </p14:section>
-        <p14:section name="Backup" id="{1b34ed18-0fdd-5e10-0f94-8fc908b78b14}">
+        <p14:section name="Backup" id="{1eee004e-cb3d-113c-933b-f4c73d2c736b}">
           <p14:sldIdLst>
             <p14:sldId id="282"/>
             <p14:sldId id="283"/>
@@ -11479,7 +11479,7 @@
                             <a:schemeClr val="tx1"/>
                           </a:solidFill>
                         </a:rPr>
-                        <a:t>MAC if &lt; 50 y (refractory); RIC otherwise</a:t>
+                        <a:t>Refractory AML: MAC if &lt; 50 y; no preferred RIC</a:t>
                       </a:r>
                       <a:endParaRPr lang="en-US" sz="1600" dirty="0"/>
                     </a:p>

--- a/slides/decks/s21-aml.pptx
+++ b/slides/decks/s21-aml.pptx
@@ -135,13 +135,13 @@
   <p:extLst>
     <p:ext uri="{521415D9-36F7-43E2-AB2F-B90AF26B5E84}">
       <p14:sectionLst xmlns:p14="http://schemas.microsoft.com/office/powerpoint/2010/main">
-        <p14:section name="Opening" id="{42f8e4f0-9ffa-4b3f-173f-451e00e62b3e}">
+        <p14:section name="Opening" id="{df4dd56a-14e6-b40a-20b6-e1729f3945a2}">
           <p14:sldIdLst>
             <p14:sldId id="256"/>
             <p14:sldId id="257"/>
           </p14:sldIdLst>
         </p14:section>
-        <p14:section name="AML in CR1" id="{5c627105-0292-3e71-2d09-73c325bf9099}">
+        <p14:section name="AML in CR1" id="{2add816f-dd89-ae89-dc47-18d2087c68d2}">
           <p14:sldIdLst>
             <p14:sldId id="258"/>
             <p14:sldId id="259"/>
@@ -152,14 +152,14 @@
             <p14:sldId id="264"/>
           </p14:sldIdLst>
         </p14:section>
-        <p14:section name="Advanced AML" id="{72732df7-aaa4-3dd6-f118-f4571ed1b478}">
+        <p14:section name="Advanced AML" id="{754e1183-d165-ff20-b5f3-9de506b2ab54}">
           <p14:sldIdLst>
             <p14:sldId id="265"/>
             <p14:sldId id="266"/>
             <p14:sldId id="267"/>
           </p14:sldIdLst>
         </p14:section>
-        <p14:section name="APL and children" id="{eac0f929-6e99-dfd2-acd2-14b666adeb9d}">
+        <p14:section name="APL and children" id="{c4180590-39fa-4f2f-c72d-4bf1f6833303}">
           <p14:sldIdLst>
             <p14:sldId id="268"/>
             <p14:sldId id="269"/>
@@ -167,7 +167,7 @@
             <p14:sldId id="271"/>
           </p14:sldIdLst>
         </p14:section>
-        <p14:section name="Board questions" id="{8fe274c5-4ccf-5792-e6a8-18a838a4c3ce}">
+        <p14:section name="Board questions" id="{e4825f53-3009-bccc-7db2-0890234daf13}">
           <p14:sldIdLst>
             <p14:sldId id="272"/>
             <p14:sldId id="273"/>
@@ -177,7 +177,7 @@
             <p14:sldId id="277"/>
           </p14:sldIdLst>
         </p14:section>
-        <p14:section name="References" id="{b0760968-ceb4-06ab-5ba2-578c83063e9b}">
+        <p14:section name="References" id="{715553e1-5369-a398-d8f5-cb832afa1858}">
           <p14:sldIdLst>
             <p14:sldId id="278"/>
             <p14:sldId id="279"/>
@@ -185,7 +185,7 @@
             <p14:sldId id="281"/>
           </p14:sldIdLst>
         </p14:section>
-        <p14:section name="Backup" id="{1eee004e-cb3d-113c-933b-f4c73d2c736b}">
+        <p14:section name="Backup" id="{78722025-5cbd-c8e5-0391-1f51a2b30ea7}">
           <p14:sldIdLst>
             <p14:sldId id="282"/>
             <p14:sldId id="283"/>
@@ -11479,7 +11479,7 @@
                             <a:schemeClr val="tx1"/>
                           </a:solidFill>
                         </a:rPr>
-                        <a:t>Refractory AML: MAC if &lt; 50 y; no preferred RIC</a:t>
+                        <a:t>MAC if &lt; 50 y (refractory AML)</a:t>
                       </a:r>
                       <a:endParaRPr lang="en-US" sz="1600" dirty="0"/>
                     </a:p>

--- a/slides/decks/s21-aml.pptx
+++ b/slides/decks/s21-aml.pptx
@@ -135,13 +135,13 @@
   <p:extLst>
     <p:ext uri="{521415D9-36F7-43E2-AB2F-B90AF26B5E84}">
       <p14:sectionLst xmlns:p14="http://schemas.microsoft.com/office/powerpoint/2010/main">
-        <p14:section name="Opening" id="{df4dd56a-14e6-b40a-20b6-e1729f3945a2}">
+        <p14:section name="Opening" id="{93255230-1a56-fa3c-c3e8-fd63a79161bc}">
           <p14:sldIdLst>
             <p14:sldId id="256"/>
             <p14:sldId id="257"/>
           </p14:sldIdLst>
         </p14:section>
-        <p14:section name="AML in CR1" id="{2add816f-dd89-ae89-dc47-18d2087c68d2}">
+        <p14:section name="AML in CR1" id="{42fb452e-cfdd-d389-be96-ed8ec5c52d40}">
           <p14:sldIdLst>
             <p14:sldId id="258"/>
             <p14:sldId id="259"/>
@@ -152,14 +152,14 @@
             <p14:sldId id="264"/>
           </p14:sldIdLst>
         </p14:section>
-        <p14:section name="Advanced AML" id="{754e1183-d165-ff20-b5f3-9de506b2ab54}">
+        <p14:section name="Advanced AML" id="{bfa9ee2a-e974-22ac-714f-ca905e5cbf68}">
           <p14:sldIdLst>
             <p14:sldId id="265"/>
             <p14:sldId id="266"/>
             <p14:sldId id="267"/>
           </p14:sldIdLst>
         </p14:section>
-        <p14:section name="APL and children" id="{c4180590-39fa-4f2f-c72d-4bf1f6833303}">
+        <p14:section name="APL and children" id="{1041a054-279f-c430-6fcc-de0e411cdabe}">
           <p14:sldIdLst>
             <p14:sldId id="268"/>
             <p14:sldId id="269"/>
@@ -167,7 +167,7 @@
             <p14:sldId id="271"/>
           </p14:sldIdLst>
         </p14:section>
-        <p14:section name="Board questions" id="{e4825f53-3009-bccc-7db2-0890234daf13}">
+        <p14:section name="Board questions" id="{b27f7e60-1127-aac2-54c5-cdb6d5617228}">
           <p14:sldIdLst>
             <p14:sldId id="272"/>
             <p14:sldId id="273"/>
@@ -177,7 +177,7 @@
             <p14:sldId id="277"/>
           </p14:sldIdLst>
         </p14:section>
-        <p14:section name="References" id="{715553e1-5369-a398-d8f5-cb832afa1858}">
+        <p14:section name="References" id="{1a3ca624-5253-e38e-b1af-698e37f9e919}">
           <p14:sldIdLst>
             <p14:sldId id="278"/>
             <p14:sldId id="279"/>
@@ -185,7 +185,7 @@
             <p14:sldId id="281"/>
           </p14:sldIdLst>
         </p14:section>
-        <p14:section name="Backup" id="{78722025-5cbd-c8e5-0391-1f51a2b30ea7}">
+        <p14:section name="Backup" id="{0399c141-da13-925e-4fed-d825a7fdf700}">
           <p14:sldIdLst>
             <p14:sldId id="282"/>
             <p14:sldId id="283"/>
